--- a/morning-registration-activities/team-challenges/downloads/Team_Challenges.pptx
+++ b/morning-registration-activities/team-challenges/downloads/Team_Challenges.pptx
@@ -3202,7 +3202,7 @@
                 <a:solidFill>
                   <a:srgbClr val="265C92"/>
                 </a:solidFill>
-                <a:latin typeface="Karla"/>
+                <a:latin typeface="Calibri"/>
               </a:rPr>
               <a:t>MORNING REGISTRATION ACTIVITIES</a:t>
             </a:r>
@@ -3241,11 +3241,11 @@
               </a:spcAft>
             </a:pPr>
             <a:r>
-              <a:rPr sz="3800" b="1" i="0">
+              <a:rPr sz="3800" b="0" i="0">
                 <a:solidFill>
                   <a:srgbClr val="265C92"/>
                 </a:solidFill>
-                <a:latin typeface="Libre Caslon Display"/>
+                <a:latin typeface="Georgia"/>
               </a:rPr>
               <a:t>Team Challenges</a:t>
             </a:r>
@@ -3300,7 +3300,7 @@
                 <a:solidFill>
                   <a:srgbClr val="FFFDF7"/>
                 </a:solidFill>
-                <a:latin typeface="Karla"/>
+                <a:latin typeface="Calibri"/>
               </a:rPr>
               <a:t>VOLUME ONE</a:t>
             </a:r>
@@ -3343,7 +3343,7 @@
                 <a:solidFill>
                   <a:srgbClr val="5C6552"/>
                 </a:solidFill>
-                <a:latin typeface="Karla"/>
+                <a:latin typeface="Calibri"/>
               </a:rPr>
               <a:t>Five challenges for teams of four or five. Describe and Draw is done in pairs.</a:t>
             </a:r>
@@ -3495,11 +3495,11 @@
               </a:spcAft>
             </a:pPr>
             <a:r>
-              <a:rPr sz="1350" b="1" i="0">
+              <a:rPr sz="1350" b="0" i="0">
                 <a:solidFill>
                   <a:srgbClr val="265C92"/>
                 </a:solidFill>
-                <a:latin typeface="Libre Caslon Display"/>
+                <a:latin typeface="Georgia"/>
               </a:rPr>
               <a:t>Get into teams</a:t>
             </a:r>
@@ -3542,7 +3542,7 @@
                 <a:solidFill>
                   <a:srgbClr val="5C6552"/>
                 </a:solidFill>
-                <a:latin typeface="Karla"/>
+                <a:latin typeface="Calibri"/>
               </a:rPr>
               <a:t>Four or five to a team, sitting together, with the chairs turned in.</a:t>
             </a:r>
@@ -3694,11 +3694,11 @@
               </a:spcAft>
             </a:pPr>
             <a:r>
-              <a:rPr sz="1350" b="1" i="0">
+              <a:rPr sz="1350" b="0" i="0">
                 <a:solidFill>
                   <a:srgbClr val="265C92"/>
                 </a:solidFill>
-                <a:latin typeface="Libre Caslon Display"/>
+                <a:latin typeface="Georgia"/>
               </a:rPr>
               <a:t>Do the challenge</a:t>
             </a:r>
@@ -3741,7 +3741,7 @@
                 <a:solidFill>
                   <a:srgbClr val="5C6552"/>
                 </a:solidFill>
-                <a:latin typeface="Karla"/>
+                <a:latin typeface="Calibri"/>
               </a:rPr>
               <a:t>Each challenge runs from its own slides. Follow them in order.</a:t>
             </a:r>
@@ -3893,11 +3893,11 @@
               </a:spcAft>
             </a:pPr>
             <a:r>
-              <a:rPr sz="1350" b="1" i="0">
+              <a:rPr sz="1350" b="0" i="0">
                 <a:solidFill>
                   <a:srgbClr val="265C92"/>
                 </a:solidFill>
-                <a:latin typeface="Libre Caslon Display"/>
+                <a:latin typeface="Georgia"/>
               </a:rPr>
               <a:t>Talk about it</a:t>
             </a:r>
@@ -3940,7 +3940,7 @@
                 <a:solidFill>
                   <a:srgbClr val="5C6552"/>
                 </a:solidFill>
-                <a:latin typeface="Karla"/>
+                <a:latin typeface="Calibri"/>
               </a:rPr>
               <a:t>Every challenge ends with a question for the whole form to talk about.</a:t>
             </a:r>
@@ -4008,7 +4008,7 @@
                 <a:solidFill>
                   <a:srgbClr val="8B9179"/>
                 </a:solidFill>
-                <a:latin typeface="Karla"/>
+                <a:latin typeface="Calibri"/>
               </a:rPr>
               <a:t>The Pastoral Guide</a:t>
             </a:r>
@@ -4051,7 +4051,7 @@
                 <a:solidFill>
                   <a:srgbClr val="8B9179"/>
                 </a:solidFill>
-                <a:latin typeface="Karla"/>
+                <a:latin typeface="Calibri"/>
               </a:rPr>
               <a:t>1 / 35</a:t>
             </a:r>
@@ -4156,7 +4156,7 @@
                 <a:solidFill>
                   <a:srgbClr val="265C92"/>
                 </a:solidFill>
-                <a:latin typeface="Karla"/>
+                <a:latin typeface="Calibri"/>
               </a:rPr>
               <a:t>LOST AT SEA  ·  TALK ABOUT IT</a:t>
             </a:r>
@@ -4291,11 +4291,11 @@
               </a:spcAft>
             </a:pPr>
             <a:r>
-              <a:rPr sz="2600" b="1" i="0">
+              <a:rPr sz="2600" b="0" i="0">
                 <a:solidFill>
                   <a:srgbClr val="265C92"/>
                 </a:solidFill>
-                <a:latin typeface="Libre Caslon Display"/>
+                <a:latin typeface="Georgia"/>
               </a:rPr>
               <a:t>What did the team that did best</a:t>
             </a:r>
@@ -4303,11 +4303,11 @@
               <a:rPr lang="en-GB"/>
             </a:br>
             <a:r>
-              <a:rPr sz="2600" b="1" i="0">
+              <a:rPr sz="2600" b="0" i="0">
                 <a:solidFill>
                   <a:srgbClr val="265C92"/>
                 </a:solidFill>
-                <a:latin typeface="Libre Caslon Display"/>
+                <a:latin typeface="Georgia"/>
               </a:rPr>
               <a:t>actually do?</a:t>
             </a:r>
@@ -4350,7 +4350,7 @@
                 <a:solidFill>
                   <a:srgbClr val="8B9179"/>
                 </a:solidFill>
-                <a:latin typeface="Karla"/>
+                <a:latin typeface="Calibri"/>
               </a:rPr>
               <a:t>THEN ASK</a:t>
             </a:r>
@@ -4437,7 +4437,7 @@
                 <a:solidFill>
                   <a:srgbClr val="2E3436"/>
                 </a:solidFill>
-                <a:latin typeface="Karla"/>
+                <a:latin typeface="Calibri"/>
               </a:rPr>
               <a:t>Did the team’s score beat most of the scores people got on their own?</a:t>
             </a:r>
@@ -4524,7 +4524,7 @@
                 <a:solidFill>
                   <a:srgbClr val="2E3436"/>
                 </a:solidFill>
-                <a:latin typeface="Karla"/>
+                <a:latin typeface="Calibri"/>
               </a:rPr>
               <a:t>Who changed the team’s mind about something, and how did they do it?</a:t>
             </a:r>
@@ -4611,7 +4611,7 @@
                 <a:solidFill>
                   <a:srgbClr val="2E3436"/>
                 </a:solidFill>
-                <a:latin typeface="Karla"/>
+                <a:latin typeface="Calibri"/>
               </a:rPr>
               <a:t>Did anybody have it right at first, but then give way to the team?</a:t>
             </a:r>
@@ -4679,7 +4679,7 @@
                 <a:solidFill>
                   <a:srgbClr val="8B9179"/>
                 </a:solidFill>
-                <a:latin typeface="Karla"/>
+                <a:latin typeface="Calibri"/>
               </a:rPr>
               <a:t>The Pastoral Guide</a:t>
             </a:r>
@@ -4722,7 +4722,7 @@
                 <a:solidFill>
                   <a:srgbClr val="8B9179"/>
                 </a:solidFill>
-                <a:latin typeface="Karla"/>
+                <a:latin typeface="Calibri"/>
               </a:rPr>
               <a:t>10 / 35</a:t>
             </a:r>
@@ -4839,7 +4839,7 @@
                 <a:solidFill>
                   <a:srgbClr val="265C92"/>
                 </a:solidFill>
-                <a:latin typeface="Karla"/>
+                <a:latin typeface="Calibri"/>
               </a:rPr>
               <a:t>CHALLENGE 2 OF 5</a:t>
             </a:r>
@@ -4947,11 +4947,11 @@
               </a:spcAft>
             </a:pPr>
             <a:r>
-              <a:rPr sz="4400" b="1" i="0">
+              <a:rPr sz="4400" b="0" i="0">
                 <a:solidFill>
                   <a:srgbClr val="FFFDF7"/>
                 </a:solidFill>
-                <a:latin typeface="Libre Caslon Display"/>
+                <a:latin typeface="Georgia"/>
               </a:rPr>
               <a:t>Paper Tower</a:t>
             </a:r>
@@ -5038,7 +5038,7 @@
                 <a:solidFill>
                   <a:srgbClr val="C2D1E0"/>
                 </a:solidFill>
-                <a:latin typeface="Karla"/>
+                <a:latin typeface="Calibri"/>
               </a:rPr>
               <a:t>Build the tallest tower you can from ten sheets of paper, with nothing to stick it together.</a:t>
             </a:r>
@@ -5106,7 +5106,7 @@
                 <a:solidFill>
                   <a:srgbClr val="C2D1E0"/>
                 </a:solidFill>
-                <a:latin typeface="Karla"/>
+                <a:latin typeface="Calibri"/>
               </a:rPr>
               <a:t>The Pastoral Guide</a:t>
             </a:r>
@@ -5149,7 +5149,7 @@
                 <a:solidFill>
                   <a:srgbClr val="C2D1E0"/>
                 </a:solidFill>
-                <a:latin typeface="Karla"/>
+                <a:latin typeface="Calibri"/>
               </a:rPr>
               <a:t>11 / 35</a:t>
             </a:r>
@@ -5254,7 +5254,7 @@
                 <a:solidFill>
                   <a:srgbClr val="265C92"/>
                 </a:solidFill>
-                <a:latin typeface="Karla"/>
+                <a:latin typeface="Calibri"/>
               </a:rPr>
               <a:t>PAPER TOWER  ·  THE RULES</a:t>
             </a:r>
@@ -5293,11 +5293,11 @@
               </a:spcAft>
             </a:pPr>
             <a:r>
-              <a:rPr sz="3000" b="1" i="0">
+              <a:rPr sz="3000" b="0" i="0">
                 <a:solidFill>
                   <a:srgbClr val="265C92"/>
                 </a:solidFill>
-                <a:latin typeface="Libre Caslon Display"/>
+                <a:latin typeface="Georgia"/>
               </a:rPr>
               <a:t>Tallest tower wins</a:t>
             </a:r>
@@ -5474,7 +5474,7 @@
                 <a:solidFill>
                   <a:srgbClr val="FFFDF7"/>
                 </a:solidFill>
-                <a:latin typeface="Karla"/>
+                <a:latin typeface="Calibri"/>
               </a:rPr>
               <a:t>1</a:t>
             </a:r>
@@ -5513,11 +5513,11 @@
               </a:spcAft>
             </a:pPr>
             <a:r>
-              <a:rPr sz="1600" b="1" i="0">
+              <a:rPr sz="1600" b="0" i="0">
                 <a:solidFill>
                   <a:srgbClr val="265C92"/>
                 </a:solidFill>
-                <a:latin typeface="Libre Caslon Display"/>
+                <a:latin typeface="Georgia"/>
               </a:rPr>
               <a:t>Ten sheets per team</a:t>
             </a:r>
@@ -5560,7 +5560,7 @@
                 <a:solidFill>
                   <a:srgbClr val="5C6552"/>
                 </a:solidFill>
-                <a:latin typeface="Karla"/>
+                <a:latin typeface="Calibri"/>
               </a:rPr>
               <a:t>Every team gets ten sheets of paper. No tape, no glue and no scissors.</a:t>
             </a:r>
@@ -5737,7 +5737,7 @@
                 <a:solidFill>
                   <a:srgbClr val="FFFDF7"/>
                 </a:solidFill>
-                <a:latin typeface="Karla"/>
+                <a:latin typeface="Calibri"/>
               </a:rPr>
               <a:t>2</a:t>
             </a:r>
@@ -5776,11 +5776,11 @@
               </a:spcAft>
             </a:pPr>
             <a:r>
-              <a:rPr sz="1600" b="1" i="0">
+              <a:rPr sz="1600" b="0" i="0">
                 <a:solidFill>
                   <a:srgbClr val="265C92"/>
                 </a:solidFill>
-                <a:latin typeface="Libre Caslon Display"/>
+                <a:latin typeface="Georgia"/>
               </a:rPr>
               <a:t>Fold, roll or tear</a:t>
             </a:r>
@@ -5823,7 +5823,7 @@
                 <a:solidFill>
                   <a:srgbClr val="5C6552"/>
                 </a:solidFill>
-                <a:latin typeface="Karla"/>
+                <a:latin typeface="Calibri"/>
               </a:rPr>
               <a:t>You can do anything to the paper, but you cannot fix it to the table or the wall.</a:t>
             </a:r>
@@ -6000,7 +6000,7 @@
                 <a:solidFill>
                   <a:srgbClr val="FFFDF7"/>
                 </a:solidFill>
-                <a:latin typeface="Karla"/>
+                <a:latin typeface="Calibri"/>
               </a:rPr>
               <a:t>3</a:t>
             </a:r>
@@ -6039,11 +6039,11 @@
               </a:spcAft>
             </a:pPr>
             <a:r>
-              <a:rPr sz="1600" b="1" i="0">
+              <a:rPr sz="1600" b="0" i="0">
                 <a:solidFill>
                   <a:srgbClr val="265C92"/>
                 </a:solidFill>
-                <a:latin typeface="Libre Caslon Display"/>
+                <a:latin typeface="Georgia"/>
               </a:rPr>
               <a:t>Ten seconds</a:t>
             </a:r>
@@ -6086,7 +6086,7 @@
                 <a:solidFill>
                   <a:srgbClr val="5C6552"/>
                 </a:solidFill>
-                <a:latin typeface="Karla"/>
+                <a:latin typeface="Calibri"/>
               </a:rPr>
               <a:t>At the end it has to stand on its own for ten seconds. The tallest one wins.</a:t>
             </a:r>
@@ -6154,7 +6154,7 @@
                 <a:solidFill>
                   <a:srgbClr val="8B9179"/>
                 </a:solidFill>
-                <a:latin typeface="Karla"/>
+                <a:latin typeface="Calibri"/>
               </a:rPr>
               <a:t>The Pastoral Guide</a:t>
             </a:r>
@@ -6197,7 +6197,7 @@
                 <a:solidFill>
                   <a:srgbClr val="8B9179"/>
                 </a:solidFill>
-                <a:latin typeface="Karla"/>
+                <a:latin typeface="Calibri"/>
               </a:rPr>
               <a:t>12 / 35</a:t>
             </a:r>
@@ -6302,7 +6302,7 @@
                 <a:solidFill>
                   <a:srgbClr val="265C92"/>
                 </a:solidFill>
-                <a:latin typeface="Karla"/>
+                <a:latin typeface="Calibri"/>
               </a:rPr>
               <a:t>PAPER TOWER</a:t>
             </a:r>
@@ -6357,7 +6357,7 @@
                 <a:solidFill>
                   <a:srgbClr val="FFFDF7"/>
                 </a:solidFill>
-                <a:latin typeface="Karla"/>
+                <a:latin typeface="Calibri"/>
               </a:rPr>
               <a:t>PLAN</a:t>
             </a:r>
@@ -6396,11 +6396,11 @@
               </a:spcAft>
             </a:pPr>
             <a:r>
-              <a:rPr sz="4400" b="1" i="0">
+              <a:rPr sz="4400" b="0" i="0">
                 <a:solidFill>
                   <a:srgbClr val="265C92"/>
                 </a:solidFill>
-                <a:latin typeface="Libre Caslon Display"/>
+                <a:latin typeface="Georgia"/>
               </a:rPr>
               <a:t>Two minutes to plan</a:t>
             </a:r>
@@ -6487,7 +6487,7 @@
                 <a:solidFill>
                   <a:srgbClr val="5C6552"/>
                 </a:solidFill>
-                <a:latin typeface="Karla"/>
+                <a:latin typeface="Calibri"/>
               </a:rPr>
               <a:t>Talk about how you will build it. Nobody touches the paper yet.</a:t>
             </a:r>
@@ -6555,7 +6555,7 @@
                 <a:solidFill>
                   <a:srgbClr val="8B9179"/>
                 </a:solidFill>
-                <a:latin typeface="Karla"/>
+                <a:latin typeface="Calibri"/>
               </a:rPr>
               <a:t>The Pastoral Guide</a:t>
             </a:r>
@@ -6598,7 +6598,7 @@
                 <a:solidFill>
                   <a:srgbClr val="8B9179"/>
                 </a:solidFill>
-                <a:latin typeface="Karla"/>
+                <a:latin typeface="Calibri"/>
               </a:rPr>
               <a:t>13 / 35</a:t>
             </a:r>
@@ -6703,7 +6703,7 @@
                 <a:solidFill>
                   <a:srgbClr val="265C92"/>
                 </a:solidFill>
-                <a:latin typeface="Karla"/>
+                <a:latin typeface="Calibri"/>
               </a:rPr>
               <a:t>PAPER TOWER</a:t>
             </a:r>
@@ -6758,7 +6758,7 @@
                 <a:solidFill>
                   <a:srgbClr val="FFFDF7"/>
                 </a:solidFill>
-                <a:latin typeface="Karla"/>
+                <a:latin typeface="Calibri"/>
               </a:rPr>
               <a:t>BUILD</a:t>
             </a:r>
@@ -6797,11 +6797,11 @@
               </a:spcAft>
             </a:pPr>
             <a:r>
-              <a:rPr sz="4400" b="1" i="0">
+              <a:rPr sz="4400" b="0" i="0">
                 <a:solidFill>
                   <a:srgbClr val="265C92"/>
                 </a:solidFill>
-                <a:latin typeface="Libre Caslon Display"/>
+                <a:latin typeface="Georgia"/>
               </a:rPr>
               <a:t>Eight minutes to build</a:t>
             </a:r>
@@ -6888,7 +6888,7 @@
                 <a:solidFill>
                   <a:srgbClr val="5C6552"/>
                 </a:solidFill>
-                <a:latin typeface="Karla"/>
+                <a:latin typeface="Calibri"/>
               </a:rPr>
               <a:t>When the time is up, your tower has to stand on its own for ten seconds.</a:t>
             </a:r>
@@ -6956,7 +6956,7 @@
                 <a:solidFill>
                   <a:srgbClr val="8B9179"/>
                 </a:solidFill>
-                <a:latin typeface="Karla"/>
+                <a:latin typeface="Calibri"/>
               </a:rPr>
               <a:t>The Pastoral Guide</a:t>
             </a:r>
@@ -6999,7 +6999,7 @@
                 <a:solidFill>
                   <a:srgbClr val="8B9179"/>
                 </a:solidFill>
-                <a:latin typeface="Karla"/>
+                <a:latin typeface="Calibri"/>
               </a:rPr>
               <a:t>14 / 35</a:t>
             </a:r>
@@ -7104,7 +7104,7 @@
                 <a:solidFill>
                   <a:srgbClr val="265C92"/>
                 </a:solidFill>
-                <a:latin typeface="Karla"/>
+                <a:latin typeface="Calibri"/>
               </a:rPr>
               <a:t>PAPER TOWER</a:t>
             </a:r>
@@ -7159,7 +7159,7 @@
                 <a:solidFill>
                   <a:srgbClr val="FFFDF7"/>
                 </a:solidFill>
-                <a:latin typeface="Karla"/>
+                <a:latin typeface="Calibri"/>
               </a:rPr>
               <a:t>MEASURE</a:t>
             </a:r>
@@ -7198,11 +7198,11 @@
               </a:spcAft>
             </a:pPr>
             <a:r>
-              <a:rPr sz="4400" b="1" i="0">
+              <a:rPr sz="4400" b="0" i="0">
                 <a:solidFill>
                   <a:srgbClr val="265C92"/>
                 </a:solidFill>
-                <a:latin typeface="Libre Caslon Display"/>
+                <a:latin typeface="Georgia"/>
               </a:rPr>
               <a:t>Hands off</a:t>
             </a:r>
@@ -7289,7 +7289,7 @@
                 <a:solidFill>
                   <a:srgbClr val="5C6552"/>
                 </a:solidFill>
-                <a:latin typeface="Karla"/>
+                <a:latin typeface="Calibri"/>
               </a:rPr>
               <a:t>Everybody steps back. Count to ten out loud together, then the towers still standing get measured.</a:t>
             </a:r>
@@ -7357,7 +7357,7 @@
                 <a:solidFill>
                   <a:srgbClr val="8B9179"/>
                 </a:solidFill>
-                <a:latin typeface="Karla"/>
+                <a:latin typeface="Calibri"/>
               </a:rPr>
               <a:t>The Pastoral Guide</a:t>
             </a:r>
@@ -7400,7 +7400,7 @@
                 <a:solidFill>
                   <a:srgbClr val="8B9179"/>
                 </a:solidFill>
-                <a:latin typeface="Karla"/>
+                <a:latin typeface="Calibri"/>
               </a:rPr>
               <a:t>15 / 35</a:t>
             </a:r>
@@ -7505,7 +7505,7 @@
                 <a:solidFill>
                   <a:srgbClr val="265C92"/>
                 </a:solidFill>
-                <a:latin typeface="Karla"/>
+                <a:latin typeface="Calibri"/>
               </a:rPr>
               <a:t>PAPER TOWER  ·  TALK ABOUT IT</a:t>
             </a:r>
@@ -7640,11 +7640,11 @@
               </a:spcAft>
             </a:pPr>
             <a:r>
-              <a:rPr sz="2600" b="1" i="0">
+              <a:rPr sz="2600" b="0" i="0">
                 <a:solidFill>
                   <a:srgbClr val="265C92"/>
                 </a:solidFill>
-                <a:latin typeface="Libre Caslon Display"/>
+                <a:latin typeface="Georgia"/>
               </a:rPr>
               <a:t>What did the team that did best</a:t>
             </a:r>
@@ -7652,11 +7652,11 @@
               <a:rPr lang="en-GB"/>
             </a:br>
             <a:r>
-              <a:rPr sz="2600" b="1" i="0">
+              <a:rPr sz="2600" b="0" i="0">
                 <a:solidFill>
                   <a:srgbClr val="265C92"/>
                 </a:solidFill>
-                <a:latin typeface="Libre Caslon Display"/>
+                <a:latin typeface="Georgia"/>
               </a:rPr>
               <a:t>actually do?</a:t>
             </a:r>
@@ -7699,7 +7699,7 @@
                 <a:solidFill>
                   <a:srgbClr val="8B9179"/>
                 </a:solidFill>
-                <a:latin typeface="Karla"/>
+                <a:latin typeface="Calibri"/>
               </a:rPr>
               <a:t>THEN ASK</a:t>
             </a:r>
@@ -7786,7 +7786,7 @@
                 <a:solidFill>
                   <a:srgbClr val="2E3436"/>
                 </a:solidFill>
-                <a:latin typeface="Karla"/>
+                <a:latin typeface="Calibri"/>
               </a:rPr>
               <a:t>Why did the tallest tower stay up when others fell?</a:t>
             </a:r>
@@ -7873,7 +7873,7 @@
                 <a:solidFill>
                   <a:srgbClr val="2E3436"/>
                 </a:solidFill>
-                <a:latin typeface="Karla"/>
+                <a:latin typeface="Calibri"/>
               </a:rPr>
               <a:t>Did your team use the planning time, or start building as soon as it could?</a:t>
             </a:r>
@@ -7960,7 +7960,7 @@
                 <a:solidFill>
                   <a:srgbClr val="2E3436"/>
                 </a:solidFill>
-                <a:latin typeface="Karla"/>
+                <a:latin typeface="Calibri"/>
               </a:rPr>
               <a:t>Whose idea did the team end up using, and did the team listen to it the first time?</a:t>
             </a:r>
@@ -8028,7 +8028,7 @@
                 <a:solidFill>
                   <a:srgbClr val="8B9179"/>
                 </a:solidFill>
-                <a:latin typeface="Karla"/>
+                <a:latin typeface="Calibri"/>
               </a:rPr>
               <a:t>The Pastoral Guide</a:t>
             </a:r>
@@ -8071,7 +8071,7 @@
                 <a:solidFill>
                   <a:srgbClr val="8B9179"/>
                 </a:solidFill>
-                <a:latin typeface="Karla"/>
+                <a:latin typeface="Calibri"/>
               </a:rPr>
               <a:t>16 / 35</a:t>
             </a:r>
@@ -8188,7 +8188,7 @@
                 <a:solidFill>
                   <a:srgbClr val="265C92"/>
                 </a:solidFill>
-                <a:latin typeface="Karla"/>
+                <a:latin typeface="Calibri"/>
               </a:rPr>
               <a:t>CHALLENGE 3 OF 5</a:t>
             </a:r>
@@ -8296,11 +8296,11 @@
               </a:spcAft>
             </a:pPr>
             <a:r>
-              <a:rPr sz="4400" b="1" i="0">
+              <a:rPr sz="4400" b="0" i="0">
                 <a:solidFill>
                   <a:srgbClr val="FFFDF7"/>
                 </a:solidFill>
-                <a:latin typeface="Libre Caslon Display"/>
+                <a:latin typeface="Georgia"/>
               </a:rPr>
               <a:t>Split Clues</a:t>
             </a:r>
@@ -8387,7 +8387,7 @@
                 <a:solidFill>
                   <a:srgbClr val="C2D1E0"/>
                 </a:solidFill>
-                <a:latin typeface="Karla"/>
+                <a:latin typeface="Calibri"/>
               </a:rPr>
               <a:t>Solve a puzzle together when the clues are shared out and nobody can see anyone else’s.</a:t>
             </a:r>
@@ -8455,7 +8455,7 @@
                 <a:solidFill>
                   <a:srgbClr val="C2D1E0"/>
                 </a:solidFill>
-                <a:latin typeface="Karla"/>
+                <a:latin typeface="Calibri"/>
               </a:rPr>
               <a:t>The Pastoral Guide</a:t>
             </a:r>
@@ -8498,7 +8498,7 @@
                 <a:solidFill>
                   <a:srgbClr val="C2D1E0"/>
                 </a:solidFill>
-                <a:latin typeface="Karla"/>
+                <a:latin typeface="Calibri"/>
               </a:rPr>
               <a:t>17 / 35</a:t>
             </a:r>
@@ -8603,7 +8603,7 @@
                 <a:solidFill>
                   <a:srgbClr val="265C92"/>
                 </a:solidFill>
-                <a:latin typeface="Karla"/>
+                <a:latin typeface="Calibri"/>
               </a:rPr>
               <a:t>SPLIT CLUES  ·  THE RULES</a:t>
             </a:r>
@@ -8642,11 +8642,11 @@
               </a:spcAft>
             </a:pPr>
             <a:r>
-              <a:rPr sz="3000" b="1" i="0">
+              <a:rPr sz="3000" b="0" i="0">
                 <a:solidFill>
                   <a:srgbClr val="265C92"/>
                 </a:solidFill>
-                <a:latin typeface="Libre Caslon Display"/>
+                <a:latin typeface="Georgia"/>
               </a:rPr>
               <a:t>Everyone holds a clue</a:t>
             </a:r>
@@ -8823,7 +8823,7 @@
                 <a:solidFill>
                   <a:srgbClr val="FFFDF7"/>
                 </a:solidFill>
-                <a:latin typeface="Karla"/>
+                <a:latin typeface="Calibri"/>
               </a:rPr>
               <a:t>1</a:t>
             </a:r>
@@ -8862,11 +8862,11 @@
               </a:spcAft>
             </a:pPr>
             <a:r>
-              <a:rPr sz="1600" b="1" i="0">
+              <a:rPr sz="1600" b="0" i="0">
                 <a:solidFill>
                   <a:srgbClr val="265C92"/>
                 </a:solidFill>
-                <a:latin typeface="Libre Caslon Display"/>
+                <a:latin typeface="Georgia"/>
               </a:rPr>
               <a:t>Share out the cards</a:t>
             </a:r>
@@ -8909,7 +8909,7 @@
                 <a:solidFill>
                   <a:srgbClr val="5C6552"/>
                 </a:solidFill>
-                <a:latin typeface="Karla"/>
+                <a:latin typeface="Calibri"/>
               </a:rPr>
               <a:t>Deal out the eight clue cards so that everybody has one or two.</a:t>
             </a:r>
@@ -9086,7 +9086,7 @@
                 <a:solidFill>
                   <a:srgbClr val="FFFDF7"/>
                 </a:solidFill>
-                <a:latin typeface="Karla"/>
+                <a:latin typeface="Calibri"/>
               </a:rPr>
               <a:t>2</a:t>
             </a:r>
@@ -9125,11 +9125,11 @@
               </a:spcAft>
             </a:pPr>
             <a:r>
-              <a:rPr sz="1600" b="1" i="0">
+              <a:rPr sz="1600" b="0" i="0">
                 <a:solidFill>
                   <a:srgbClr val="265C92"/>
                 </a:solidFill>
-                <a:latin typeface="Libre Caslon Display"/>
+                <a:latin typeface="Georgia"/>
               </a:rPr>
               <a:t>Say it, never show it</a:t>
             </a:r>
@@ -9172,7 +9172,7 @@
                 <a:solidFill>
                   <a:srgbClr val="5C6552"/>
                 </a:solidFill>
-                <a:latin typeface="Karla"/>
+                <a:latin typeface="Calibri"/>
               </a:rPr>
               <a:t>You can read your clue out as often as you like, but nobody else can see it.</a:t>
             </a:r>
@@ -9349,7 +9349,7 @@
                 <a:solidFill>
                   <a:srgbClr val="FFFDF7"/>
                 </a:solidFill>
-                <a:latin typeface="Karla"/>
+                <a:latin typeface="Calibri"/>
               </a:rPr>
               <a:t>3</a:t>
             </a:r>
@@ -9388,11 +9388,11 @@
               </a:spcAft>
             </a:pPr>
             <a:r>
-              <a:rPr sz="1600" b="1" i="0">
+              <a:rPr sz="1600" b="0" i="0">
                 <a:solidFill>
                   <a:srgbClr val="265C92"/>
                 </a:solidFill>
-                <a:latin typeface="Libre Caslon Display"/>
+                <a:latin typeface="Georgia"/>
               </a:rPr>
               <a:t>Solve it together</a:t>
             </a:r>
@@ -9435,7 +9435,7 @@
                 <a:solidFill>
                   <a:srgbClr val="5C6552"/>
                 </a:solidFill>
-                <a:latin typeface="Karla"/>
+                <a:latin typeface="Calibri"/>
               </a:rPr>
               <a:t>Work out who lost what, and on which day. Use the grid on your sheet to keep track.</a:t>
             </a:r>
@@ -9503,7 +9503,7 @@
                 <a:solidFill>
                   <a:srgbClr val="8B9179"/>
                 </a:solidFill>
-                <a:latin typeface="Karla"/>
+                <a:latin typeface="Calibri"/>
               </a:rPr>
               <a:t>The Pastoral Guide</a:t>
             </a:r>
@@ -9546,7 +9546,7 @@
                 <a:solidFill>
                   <a:srgbClr val="8B9179"/>
                 </a:solidFill>
-                <a:latin typeface="Karla"/>
+                <a:latin typeface="Calibri"/>
               </a:rPr>
               <a:t>18 / 35</a:t>
             </a:r>
@@ -9651,7 +9651,7 @@
                 <a:solidFill>
                   <a:srgbClr val="265C92"/>
                 </a:solidFill>
-                <a:latin typeface="Karla"/>
+                <a:latin typeface="Calibri"/>
               </a:rPr>
               <a:t>SPLIT CLUES  ·  THE PUZZLE</a:t>
             </a:r>
@@ -9690,11 +9690,11 @@
               </a:spcAft>
             </a:pPr>
             <a:r>
-              <a:rPr sz="3000" b="1" i="0">
+              <a:rPr sz="3000" b="0" i="0">
                 <a:solidFill>
                   <a:srgbClr val="265C92"/>
                 </a:solidFill>
-                <a:latin typeface="Libre Caslon Display"/>
+                <a:latin typeface="Georgia"/>
               </a:rPr>
               <a:t>The lost property box</a:t>
             </a:r>
@@ -9737,7 +9737,7 @@
                 <a:solidFill>
                   <a:srgbClr val="2E3436"/>
                 </a:solidFill>
-                <a:latin typeface="Karla"/>
+                <a:latin typeface="Calibri"/>
               </a:rPr>
               <a:t>Last week, four students each lost one thing, on a different day from Monday to Thursday. The students were Amira, Ben, Chloe and Dev. The four things were a scarf, a water bottle, a PE bag and a pencil case.</a:t>
             </a:r>
@@ -9866,11 +9866,11 @@
               </a:spcAft>
             </a:pPr>
             <a:r>
-              <a:rPr sz="2600" b="1" i="0">
+              <a:rPr sz="2600" b="0" i="0">
                 <a:solidFill>
                   <a:srgbClr val="265C92"/>
                 </a:solidFill>
-                <a:latin typeface="Libre Caslon Display"/>
+                <a:latin typeface="Georgia"/>
               </a:rPr>
               <a:t>Who lost what, and on which day?</a:t>
             </a:r>
@@ -9913,7 +9913,7 @@
                 <a:solidFill>
                   <a:srgbClr val="5C6552"/>
                 </a:solidFill>
-                <a:latin typeface="Karla"/>
+                <a:latin typeface="Calibri"/>
               </a:rPr>
               <a:t>Every one of the eight clues is needed. When your team thinks it has the answer, put your hands up and your teacher will check it.</a:t>
             </a:r>
@@ -9981,7 +9981,7 @@
                 <a:solidFill>
                   <a:srgbClr val="8B9179"/>
                 </a:solidFill>
-                <a:latin typeface="Karla"/>
+                <a:latin typeface="Calibri"/>
               </a:rPr>
               <a:t>The Pastoral Guide</a:t>
             </a:r>
@@ -10024,7 +10024,7 @@
                 <a:solidFill>
                   <a:srgbClr val="8B9179"/>
                 </a:solidFill>
-                <a:latin typeface="Karla"/>
+                <a:latin typeface="Calibri"/>
               </a:rPr>
               <a:t>19 / 35</a:t>
             </a:r>
@@ -10129,7 +10129,7 @@
                 <a:solidFill>
                   <a:srgbClr val="265C92"/>
                 </a:solidFill>
-                <a:latin typeface="Karla"/>
+                <a:latin typeface="Calibri"/>
               </a:rPr>
               <a:t>TEAM CHALLENGES  ·  VOLUME ONE</a:t>
             </a:r>
@@ -10168,11 +10168,11 @@
               </a:spcAft>
             </a:pPr>
             <a:r>
-              <a:rPr sz="3000" b="1" i="0">
+              <a:rPr sz="3000" b="0" i="0">
                 <a:solidFill>
                   <a:srgbClr val="265C92"/>
                 </a:solidFill>
-                <a:latin typeface="Libre Caslon Display"/>
+                <a:latin typeface="Georgia"/>
               </a:rPr>
               <a:t>The five challenges</a:t>
             </a:r>
@@ -10259,7 +10259,7 @@
                 <a:solidFill>
                   <a:srgbClr val="265C92"/>
                 </a:solidFill>
-                <a:latin typeface="Karla"/>
+                <a:latin typeface="Calibri"/>
               </a:rPr>
               <a:t>ONE</a:t>
             </a:r>
@@ -10367,11 +10367,11 @@
               </a:spcAft>
             </a:pPr>
             <a:r>
-              <a:rPr sz="1350" b="1" i="0">
+              <a:rPr sz="1350" b="0" i="0">
                 <a:solidFill>
                   <a:srgbClr val="265C92"/>
                 </a:solidFill>
-                <a:latin typeface="Libre Caslon Display"/>
+                <a:latin typeface="Georgia"/>
               </a:rPr>
               <a:t>Lost</a:t>
             </a:r>
@@ -10379,11 +10379,11 @@
               <a:rPr lang="en-GB"/>
             </a:br>
             <a:r>
-              <a:rPr sz="1350" b="1" i="0">
+              <a:rPr sz="1350" b="0" i="0">
                 <a:solidFill>
                   <a:srgbClr val="265C92"/>
                 </a:solidFill>
-                <a:latin typeface="Libre Caslon Display"/>
+                <a:latin typeface="Georgia"/>
               </a:rPr>
               <a:t>at Sea</a:t>
             </a:r>
@@ -10470,7 +10470,7 @@
                 <a:solidFill>
                   <a:srgbClr val="265C92"/>
                 </a:solidFill>
-                <a:latin typeface="Karla"/>
+                <a:latin typeface="Calibri"/>
               </a:rPr>
               <a:t>TWO</a:t>
             </a:r>
@@ -10578,11 +10578,11 @@
               </a:spcAft>
             </a:pPr>
             <a:r>
-              <a:rPr sz="1350" b="1" i="0">
+              <a:rPr sz="1350" b="0" i="0">
                 <a:solidFill>
                   <a:srgbClr val="265C92"/>
                 </a:solidFill>
-                <a:latin typeface="Libre Caslon Display"/>
+                <a:latin typeface="Georgia"/>
               </a:rPr>
               <a:t>Paper</a:t>
             </a:r>
@@ -10590,11 +10590,11 @@
               <a:rPr lang="en-GB"/>
             </a:br>
             <a:r>
-              <a:rPr sz="1350" b="1" i="0">
+              <a:rPr sz="1350" b="0" i="0">
                 <a:solidFill>
                   <a:srgbClr val="265C92"/>
                 </a:solidFill>
-                <a:latin typeface="Libre Caslon Display"/>
+                <a:latin typeface="Georgia"/>
               </a:rPr>
               <a:t>Tower</a:t>
             </a:r>
@@ -10681,7 +10681,7 @@
                 <a:solidFill>
                   <a:srgbClr val="265C92"/>
                 </a:solidFill>
-                <a:latin typeface="Karla"/>
+                <a:latin typeface="Calibri"/>
               </a:rPr>
               <a:t>THREE</a:t>
             </a:r>
@@ -10789,11 +10789,11 @@
               </a:spcAft>
             </a:pPr>
             <a:r>
-              <a:rPr sz="1350" b="1" i="0">
+              <a:rPr sz="1350" b="0" i="0">
                 <a:solidFill>
                   <a:srgbClr val="265C92"/>
                 </a:solidFill>
-                <a:latin typeface="Libre Caslon Display"/>
+                <a:latin typeface="Georgia"/>
               </a:rPr>
               <a:t>Split</a:t>
             </a:r>
@@ -10801,11 +10801,11 @@
               <a:rPr lang="en-GB"/>
             </a:br>
             <a:r>
-              <a:rPr sz="1350" b="1" i="0">
+              <a:rPr sz="1350" b="0" i="0">
                 <a:solidFill>
                   <a:srgbClr val="265C92"/>
                 </a:solidFill>
-                <a:latin typeface="Libre Caslon Display"/>
+                <a:latin typeface="Georgia"/>
               </a:rPr>
               <a:t>Clues</a:t>
             </a:r>
@@ -10892,7 +10892,7 @@
                 <a:solidFill>
                   <a:srgbClr val="265C92"/>
                 </a:solidFill>
-                <a:latin typeface="Karla"/>
+                <a:latin typeface="Calibri"/>
               </a:rPr>
               <a:t>FOUR</a:t>
             </a:r>
@@ -11000,11 +11000,11 @@
               </a:spcAft>
             </a:pPr>
             <a:r>
-              <a:rPr sz="1350" b="1" i="0">
+              <a:rPr sz="1350" b="0" i="0">
                 <a:solidFill>
                   <a:srgbClr val="265C92"/>
                 </a:solidFill>
-                <a:latin typeface="Libre Caslon Display"/>
+                <a:latin typeface="Georgia"/>
               </a:rPr>
               <a:t>Describe</a:t>
             </a:r>
@@ -11012,11 +11012,11 @@
               <a:rPr lang="en-GB"/>
             </a:br>
             <a:r>
-              <a:rPr sz="1350" b="1" i="0">
+              <a:rPr sz="1350" b="0" i="0">
                 <a:solidFill>
                   <a:srgbClr val="265C92"/>
                 </a:solidFill>
-                <a:latin typeface="Libre Caslon Display"/>
+                <a:latin typeface="Georgia"/>
               </a:rPr>
               <a:t>and Draw</a:t>
             </a:r>
@@ -11103,7 +11103,7 @@
                 <a:solidFill>
                   <a:srgbClr val="265C92"/>
                 </a:solidFill>
-                <a:latin typeface="Karla"/>
+                <a:latin typeface="Calibri"/>
               </a:rPr>
               <a:t>FIVE</a:t>
             </a:r>
@@ -11211,11 +11211,11 @@
               </a:spcAft>
             </a:pPr>
             <a:r>
-              <a:rPr sz="1350" b="1" i="0">
+              <a:rPr sz="1350" b="0" i="0">
                 <a:solidFill>
                   <a:srgbClr val="265C92"/>
                 </a:solidFill>
-                <a:latin typeface="Libre Caslon Display"/>
+                <a:latin typeface="Georgia"/>
               </a:rPr>
               <a:t>Silent</a:t>
             </a:r>
@@ -11223,11 +11223,11 @@
               <a:rPr lang="en-GB"/>
             </a:br>
             <a:r>
-              <a:rPr sz="1350" b="1" i="0">
+              <a:rPr sz="1350" b="0" i="0">
                 <a:solidFill>
                   <a:srgbClr val="265C92"/>
                 </a:solidFill>
-                <a:latin typeface="Libre Caslon Display"/>
+                <a:latin typeface="Georgia"/>
               </a:rPr>
               <a:t>Line-Up</a:t>
             </a:r>
@@ -11270,7 +11270,7 @@
                 <a:solidFill>
                   <a:srgbClr val="5C6552"/>
                 </a:solidFill>
-                <a:latin typeface="Karla"/>
+                <a:latin typeface="Calibri"/>
               </a:rPr>
               <a:t>Every one of them ends by asking what the best team,</a:t>
             </a:r>
@@ -11289,7 +11289,7 @@
                 <a:solidFill>
                   <a:srgbClr val="5C6552"/>
                 </a:solidFill>
-                <a:latin typeface="Karla"/>
+                <a:latin typeface="Calibri"/>
               </a:rPr>
               <a:t>or the best pair, actually did.</a:t>
             </a:r>
@@ -11357,7 +11357,7 @@
                 <a:solidFill>
                   <a:srgbClr val="8B9179"/>
                 </a:solidFill>
-                <a:latin typeface="Karla"/>
+                <a:latin typeface="Calibri"/>
               </a:rPr>
               <a:t>The Pastoral Guide</a:t>
             </a:r>
@@ -11400,7 +11400,7 @@
                 <a:solidFill>
                   <a:srgbClr val="8B9179"/>
                 </a:solidFill>
-                <a:latin typeface="Karla"/>
+                <a:latin typeface="Calibri"/>
               </a:rPr>
               <a:t>2 / 35</a:t>
             </a:r>
@@ -11505,7 +11505,7 @@
                 <a:solidFill>
                   <a:srgbClr val="265C92"/>
                 </a:solidFill>
-                <a:latin typeface="Karla"/>
+                <a:latin typeface="Calibri"/>
               </a:rPr>
               <a:t>SPLIT CLUES  ·  THE ANSWER</a:t>
             </a:r>
@@ -11544,11 +11544,11 @@
               </a:spcAft>
             </a:pPr>
             <a:r>
-              <a:rPr sz="3000" b="1" i="0">
+              <a:rPr sz="3000" b="0" i="0">
                 <a:solidFill>
                   <a:srgbClr val="265C92"/>
                 </a:solidFill>
-                <a:latin typeface="Libre Caslon Display"/>
+                <a:latin typeface="Georgia"/>
               </a:rPr>
               <a:t>Who lost what</a:t>
             </a:r>
@@ -11681,7 +11681,7 @@
                 <a:solidFill>
                   <a:srgbClr val="265C92"/>
                 </a:solidFill>
-                <a:latin typeface="Karla"/>
+                <a:latin typeface="Calibri"/>
               </a:rPr>
               <a:t>MONDAY</a:t>
             </a:r>
@@ -11720,11 +11720,11 @@
               </a:spcAft>
             </a:pPr>
             <a:r>
-              <a:rPr sz="1800" b="1" i="0">
+              <a:rPr sz="1800" b="0" i="0">
                 <a:solidFill>
                   <a:srgbClr val="2E3436"/>
                 </a:solidFill>
-                <a:latin typeface="Libre Caslon Display"/>
+                <a:latin typeface="Georgia"/>
               </a:rPr>
               <a:t>Amira lost the PE bag.</a:t>
             </a:r>
@@ -11857,7 +11857,7 @@
                 <a:solidFill>
                   <a:srgbClr val="265C92"/>
                 </a:solidFill>
-                <a:latin typeface="Karla"/>
+                <a:latin typeface="Calibri"/>
               </a:rPr>
               <a:t>TUESDAY</a:t>
             </a:r>
@@ -11896,11 +11896,11 @@
               </a:spcAft>
             </a:pPr>
             <a:r>
-              <a:rPr sz="1800" b="1" i="0">
+              <a:rPr sz="1800" b="0" i="0">
                 <a:solidFill>
                   <a:srgbClr val="2E3436"/>
                 </a:solidFill>
-                <a:latin typeface="Libre Caslon Display"/>
+                <a:latin typeface="Georgia"/>
               </a:rPr>
               <a:t>Dev lost the scarf.</a:t>
             </a:r>
@@ -12033,7 +12033,7 @@
                 <a:solidFill>
                   <a:srgbClr val="265C92"/>
                 </a:solidFill>
-                <a:latin typeface="Karla"/>
+                <a:latin typeface="Calibri"/>
               </a:rPr>
               <a:t>WEDNESDAY</a:t>
             </a:r>
@@ -12072,11 +12072,11 @@
               </a:spcAft>
             </a:pPr>
             <a:r>
-              <a:rPr sz="1800" b="1" i="0">
+              <a:rPr sz="1800" b="0" i="0">
                 <a:solidFill>
                   <a:srgbClr val="2E3436"/>
                 </a:solidFill>
-                <a:latin typeface="Libre Caslon Display"/>
+                <a:latin typeface="Georgia"/>
               </a:rPr>
               <a:t>Chloe lost the water bottle.</a:t>
             </a:r>
@@ -12209,7 +12209,7 @@
                 <a:solidFill>
                   <a:srgbClr val="265C92"/>
                 </a:solidFill>
-                <a:latin typeface="Karla"/>
+                <a:latin typeface="Calibri"/>
               </a:rPr>
               <a:t>THURSDAY</a:t>
             </a:r>
@@ -12248,11 +12248,11 @@
               </a:spcAft>
             </a:pPr>
             <a:r>
-              <a:rPr sz="1800" b="1" i="0">
+              <a:rPr sz="1800" b="0" i="0">
                 <a:solidFill>
                   <a:srgbClr val="2E3436"/>
                 </a:solidFill>
-                <a:latin typeface="Libre Caslon Display"/>
+                <a:latin typeface="Georgia"/>
               </a:rPr>
               <a:t>Ben lost the pencil case.</a:t>
             </a:r>
@@ -12320,7 +12320,7 @@
                 <a:solidFill>
                   <a:srgbClr val="8B9179"/>
                 </a:solidFill>
-                <a:latin typeface="Karla"/>
+                <a:latin typeface="Calibri"/>
               </a:rPr>
               <a:t>The Pastoral Guide</a:t>
             </a:r>
@@ -12363,7 +12363,7 @@
                 <a:solidFill>
                   <a:srgbClr val="8B9179"/>
                 </a:solidFill>
-                <a:latin typeface="Karla"/>
+                <a:latin typeface="Calibri"/>
               </a:rPr>
               <a:t>20 / 35</a:t>
             </a:r>
@@ -12468,7 +12468,7 @@
                 <a:solidFill>
                   <a:srgbClr val="265C92"/>
                 </a:solidFill>
-                <a:latin typeface="Karla"/>
+                <a:latin typeface="Calibri"/>
               </a:rPr>
               <a:t>SPLIT CLUES  ·  TALK ABOUT IT</a:t>
             </a:r>
@@ -12603,11 +12603,11 @@
               </a:spcAft>
             </a:pPr>
             <a:r>
-              <a:rPr sz="2600" b="1" i="0">
+              <a:rPr sz="2600" b="0" i="0">
                 <a:solidFill>
                   <a:srgbClr val="265C92"/>
                 </a:solidFill>
-                <a:latin typeface="Libre Caslon Display"/>
+                <a:latin typeface="Georgia"/>
               </a:rPr>
               <a:t>What did the team that did best</a:t>
             </a:r>
@@ -12615,11 +12615,11 @@
               <a:rPr lang="en-GB"/>
             </a:br>
             <a:r>
-              <a:rPr sz="2600" b="1" i="0">
+              <a:rPr sz="2600" b="0" i="0">
                 <a:solidFill>
                   <a:srgbClr val="265C92"/>
                 </a:solidFill>
-                <a:latin typeface="Libre Caslon Display"/>
+                <a:latin typeface="Georgia"/>
               </a:rPr>
               <a:t>actually do?</a:t>
             </a:r>
@@ -12662,7 +12662,7 @@
                 <a:solidFill>
                   <a:srgbClr val="8B9179"/>
                 </a:solidFill>
-                <a:latin typeface="Karla"/>
+                <a:latin typeface="Calibri"/>
               </a:rPr>
               <a:t>THEN ASK</a:t>
             </a:r>
@@ -12749,7 +12749,7 @@
                 <a:solidFill>
                   <a:srgbClr val="2E3436"/>
                 </a:solidFill>
-                <a:latin typeface="Karla"/>
+                <a:latin typeface="Calibri"/>
               </a:rPr>
               <a:t>Did every clue get heard, or was somebody’s clue missed at first?</a:t>
             </a:r>
@@ -12836,7 +12836,7 @@
                 <a:solidFill>
                   <a:srgbClr val="2E3436"/>
                 </a:solidFill>
-                <a:latin typeface="Karla"/>
+                <a:latin typeface="Calibri"/>
               </a:rPr>
               <a:t>Who wrote things down, and did it help the rest of the team?</a:t>
             </a:r>
@@ -12923,7 +12923,7 @@
                 <a:solidFill>
                   <a:srgbClr val="2E3436"/>
                 </a:solidFill>
-                <a:latin typeface="Karla"/>
+                <a:latin typeface="Calibri"/>
               </a:rPr>
               <a:t>If you had a new set of clues tomorrow, what would you do first?</a:t>
             </a:r>
@@ -12991,7 +12991,7 @@
                 <a:solidFill>
                   <a:srgbClr val="8B9179"/>
                 </a:solidFill>
-                <a:latin typeface="Karla"/>
+                <a:latin typeface="Calibri"/>
               </a:rPr>
               <a:t>The Pastoral Guide</a:t>
             </a:r>
@@ -13034,7 +13034,7 @@
                 <a:solidFill>
                   <a:srgbClr val="8B9179"/>
                 </a:solidFill>
-                <a:latin typeface="Karla"/>
+                <a:latin typeface="Calibri"/>
               </a:rPr>
               <a:t>21 / 35</a:t>
             </a:r>
@@ -13151,7 +13151,7 @@
                 <a:solidFill>
                   <a:srgbClr val="265C92"/>
                 </a:solidFill>
-                <a:latin typeface="Karla"/>
+                <a:latin typeface="Calibri"/>
               </a:rPr>
               <a:t>CHALLENGE 4 OF 5</a:t>
             </a:r>
@@ -13259,11 +13259,11 @@
               </a:spcAft>
             </a:pPr>
             <a:r>
-              <a:rPr sz="4400" b="1" i="0">
+              <a:rPr sz="4400" b="0" i="0">
                 <a:solidFill>
                   <a:srgbClr val="FFFDF7"/>
                 </a:solidFill>
-                <a:latin typeface="Libre Caslon Display"/>
+                <a:latin typeface="Georgia"/>
               </a:rPr>
               <a:t>Describe and Draw</a:t>
             </a:r>
@@ -13350,7 +13350,7 @@
                 <a:solidFill>
                   <a:srgbClr val="C2D1E0"/>
                 </a:solidFill>
-                <a:latin typeface="Karla"/>
+                <a:latin typeface="Calibri"/>
               </a:rPr>
               <a:t>One of you describes a picture and the other draws it without seeing it.</a:t>
             </a:r>
@@ -13418,7 +13418,7 @@
                 <a:solidFill>
                   <a:srgbClr val="C2D1E0"/>
                 </a:solidFill>
-                <a:latin typeface="Karla"/>
+                <a:latin typeface="Calibri"/>
               </a:rPr>
               <a:t>The Pastoral Guide</a:t>
             </a:r>
@@ -13461,7 +13461,7 @@
                 <a:solidFill>
                   <a:srgbClr val="C2D1E0"/>
                 </a:solidFill>
-                <a:latin typeface="Karla"/>
+                <a:latin typeface="Calibri"/>
               </a:rPr>
               <a:t>22 / 35</a:t>
             </a:r>
@@ -13566,7 +13566,7 @@
                 <a:solidFill>
                   <a:srgbClr val="265C92"/>
                 </a:solidFill>
-                <a:latin typeface="Karla"/>
+                <a:latin typeface="Calibri"/>
               </a:rPr>
               <a:t>DESCRIBE AND DRAW  ·  SET UP</a:t>
             </a:r>
@@ -13605,11 +13605,11 @@
               </a:spcAft>
             </a:pPr>
             <a:r>
-              <a:rPr sz="3000" b="1" i="0">
+              <a:rPr sz="3000" b="0" i="0">
                 <a:solidFill>
                   <a:srgbClr val="265C92"/>
                 </a:solidFill>
-                <a:latin typeface="Libre Caslon Display"/>
+                <a:latin typeface="Georgia"/>
               </a:rPr>
               <a:t>Get into pairs</a:t>
             </a:r>
@@ -13786,7 +13786,7 @@
                 <a:solidFill>
                   <a:srgbClr val="FFFDF7"/>
                 </a:solidFill>
-                <a:latin typeface="Karla"/>
+                <a:latin typeface="Calibri"/>
               </a:rPr>
               <a:t>1</a:t>
             </a:r>
@@ -13825,11 +13825,11 @@
               </a:spcAft>
             </a:pPr>
             <a:r>
-              <a:rPr sz="1600" b="1" i="0">
+              <a:rPr sz="1600" b="0" i="0">
                 <a:solidFill>
                   <a:srgbClr val="265C92"/>
                 </a:solidFill>
-                <a:latin typeface="Libre Caslon Display"/>
+                <a:latin typeface="Georgia"/>
               </a:rPr>
               <a:t>Facing the board</a:t>
             </a:r>
@@ -13872,7 +13872,7 @@
                 <a:solidFill>
                   <a:srgbClr val="5C6552"/>
                 </a:solidFill>
-                <a:latin typeface="Karla"/>
+                <a:latin typeface="Calibri"/>
               </a:rPr>
               <a:t>The describer faces the board and describes the picture on it.</a:t>
             </a:r>
@@ -14049,7 +14049,7 @@
                 <a:solidFill>
                   <a:srgbClr val="FFFDF7"/>
                 </a:solidFill>
-                <a:latin typeface="Karla"/>
+                <a:latin typeface="Calibri"/>
               </a:rPr>
               <a:t>2</a:t>
             </a:r>
@@ -14088,11 +14088,11 @@
               </a:spcAft>
             </a:pPr>
             <a:r>
-              <a:rPr sz="1600" b="1" i="0">
+              <a:rPr sz="1600" b="0" i="0">
                 <a:solidFill>
                   <a:srgbClr val="265C92"/>
                 </a:solidFill>
-                <a:latin typeface="Libre Caslon Display"/>
+                <a:latin typeface="Georgia"/>
               </a:rPr>
               <a:t>Back to the board</a:t>
             </a:r>
@@ -14135,7 +14135,7 @@
                 <a:solidFill>
                   <a:srgbClr val="5C6552"/>
                 </a:solidFill>
-                <a:latin typeface="Karla"/>
+                <a:latin typeface="Calibri"/>
               </a:rPr>
               <a:t>The drawer sits with their back to the board, with a pen and a sheet of paper.</a:t>
             </a:r>
@@ -14178,7 +14178,7 @@
                 <a:solidFill>
                   <a:srgbClr val="265C92"/>
                 </a:solidFill>
-                <a:latin typeface="Karla"/>
+                <a:latin typeface="Calibri"/>
               </a:rPr>
               <a:t>Drawers: turn your chair round now, before the picture goes up. If there are three of you, two draw and one describes.</a:t>
             </a:r>
@@ -14246,7 +14246,7 @@
                 <a:solidFill>
                   <a:srgbClr val="8B9179"/>
                 </a:solidFill>
-                <a:latin typeface="Karla"/>
+                <a:latin typeface="Calibri"/>
               </a:rPr>
               <a:t>The Pastoral Guide</a:t>
             </a:r>
@@ -14289,7 +14289,7 @@
                 <a:solidFill>
                   <a:srgbClr val="8B9179"/>
                 </a:solidFill>
-                <a:latin typeface="Karla"/>
+                <a:latin typeface="Calibri"/>
               </a:rPr>
               <a:t>23 / 35</a:t>
             </a:r>
@@ -14394,7 +14394,7 @@
                 <a:solidFill>
                   <a:srgbClr val="265C92"/>
                 </a:solidFill>
-                <a:latin typeface="Karla"/>
+                <a:latin typeface="Calibri"/>
               </a:rPr>
               <a:t>DESCRIBE AND DRAW  ·  ROUND ONE</a:t>
             </a:r>
@@ -14433,11 +14433,11 @@
               </a:spcAft>
             </a:pPr>
             <a:r>
-              <a:rPr sz="3000" b="1" i="0">
+              <a:rPr sz="3000" b="0" i="0">
                 <a:solidFill>
                   <a:srgbClr val="265C92"/>
                 </a:solidFill>
-                <a:latin typeface="Libre Caslon Display"/>
+                <a:latin typeface="Georgia"/>
               </a:rPr>
               <a:t>Round one: no questions</a:t>
             </a:r>
@@ -14614,7 +14614,7 @@
                 <a:solidFill>
                   <a:srgbClr val="FFFDF7"/>
                 </a:solidFill>
-                <a:latin typeface="Karla"/>
+                <a:latin typeface="Calibri"/>
               </a:rPr>
               <a:t>1</a:t>
             </a:r>
@@ -14653,11 +14653,11 @@
               </a:spcAft>
             </a:pPr>
             <a:r>
-              <a:rPr sz="1600" b="1" i="0">
+              <a:rPr sz="1600" b="0" i="0">
                 <a:solidFill>
                   <a:srgbClr val="265C92"/>
                 </a:solidFill>
-                <a:latin typeface="Libre Caslon Display"/>
+                <a:latin typeface="Georgia"/>
               </a:rPr>
               <a:t>Describer</a:t>
             </a:r>
@@ -14700,7 +14700,7 @@
                 <a:solidFill>
                   <a:srgbClr val="5C6552"/>
                 </a:solidFill>
-                <a:latin typeface="Karla"/>
+                <a:latin typeface="Calibri"/>
               </a:rPr>
               <a:t>Say what you see. No pointing, and no drawing shapes in the air.</a:t>
             </a:r>
@@ -14877,7 +14877,7 @@
                 <a:solidFill>
                   <a:srgbClr val="FFFDF7"/>
                 </a:solidFill>
-                <a:latin typeface="Karla"/>
+                <a:latin typeface="Calibri"/>
               </a:rPr>
               <a:t>2</a:t>
             </a:r>
@@ -14916,11 +14916,11 @@
               </a:spcAft>
             </a:pPr>
             <a:r>
-              <a:rPr sz="1600" b="1" i="0">
+              <a:rPr sz="1600" b="0" i="0">
                 <a:solidFill>
                   <a:srgbClr val="265C92"/>
                 </a:solidFill>
-                <a:latin typeface="Libre Caslon Display"/>
+                <a:latin typeface="Georgia"/>
               </a:rPr>
               <a:t>Drawer</a:t>
             </a:r>
@@ -14963,7 +14963,7 @@
                 <a:solidFill>
                   <a:srgbClr val="5C6552"/>
                 </a:solidFill>
-                <a:latin typeface="Karla"/>
+                <a:latin typeface="Calibri"/>
               </a:rPr>
               <a:t>Draw what you hear, without asking questions or talking.</a:t>
             </a:r>
@@ -15006,7 +15006,7 @@
                 <a:solidFill>
                   <a:srgbClr val="265C92"/>
                 </a:solidFill>
-                <a:latin typeface="Karla"/>
+                <a:latin typeface="Calibri"/>
               </a:rPr>
               <a:t>When the picture goes up, you have three minutes.</a:t>
             </a:r>
@@ -15074,7 +15074,7 @@
                 <a:solidFill>
                   <a:srgbClr val="8B9179"/>
                 </a:solidFill>
-                <a:latin typeface="Karla"/>
+                <a:latin typeface="Calibri"/>
               </a:rPr>
               <a:t>The Pastoral Guide</a:t>
             </a:r>
@@ -15117,7 +15117,7 @@
                 <a:solidFill>
                   <a:srgbClr val="8B9179"/>
                 </a:solidFill>
-                <a:latin typeface="Karla"/>
+                <a:latin typeface="Calibri"/>
               </a:rPr>
               <a:t>24 / 35</a:t>
             </a:r>
@@ -15234,7 +15234,7 @@
                 <a:solidFill>
                   <a:srgbClr val="FFFDF7"/>
                 </a:solidFill>
-                <a:latin typeface="Karla"/>
+                <a:latin typeface="Calibri"/>
               </a:rPr>
               <a:t>ROUND ONE  ·  DESCRIBERS ONLY</a:t>
             </a:r>
@@ -15327,7 +15327,7 @@
                 <a:solidFill>
                   <a:srgbClr val="8B9179"/>
                 </a:solidFill>
-                <a:latin typeface="Karla"/>
+                <a:latin typeface="Calibri"/>
               </a:rPr>
               <a:t>The Pastoral Guide</a:t>
             </a:r>
@@ -15370,7 +15370,7 @@
                 <a:solidFill>
                   <a:srgbClr val="8B9179"/>
                 </a:solidFill>
-                <a:latin typeface="Karla"/>
+                <a:latin typeface="Calibri"/>
               </a:rPr>
               <a:t>25 / 35</a:t>
             </a:r>
@@ -15475,7 +15475,7 @@
                 <a:solidFill>
                   <a:srgbClr val="265C92"/>
                 </a:solidFill>
-                <a:latin typeface="Karla"/>
+                <a:latin typeface="Calibri"/>
               </a:rPr>
               <a:t>DESCRIBE AND DRAW  ·  ROUND TWO</a:t>
             </a:r>
@@ -15514,11 +15514,11 @@
               </a:spcAft>
             </a:pPr>
             <a:r>
-              <a:rPr sz="3000" b="1" i="0">
+              <a:rPr sz="3000" b="0" i="0">
                 <a:solidFill>
                   <a:srgbClr val="265C92"/>
                 </a:solidFill>
-                <a:latin typeface="Libre Caslon Display"/>
+                <a:latin typeface="Georgia"/>
               </a:rPr>
               <a:t>Round two: ask away</a:t>
             </a:r>
@@ -15695,7 +15695,7 @@
                 <a:solidFill>
                   <a:srgbClr val="FFFDF7"/>
                 </a:solidFill>
-                <a:latin typeface="Karla"/>
+                <a:latin typeface="Calibri"/>
               </a:rPr>
               <a:t>1</a:t>
             </a:r>
@@ -15734,11 +15734,11 @@
               </a:spcAft>
             </a:pPr>
             <a:r>
-              <a:rPr sz="1600" b="1" i="0">
+              <a:rPr sz="1600" b="0" i="0">
                 <a:solidFill>
                   <a:srgbClr val="265C92"/>
                 </a:solidFill>
-                <a:latin typeface="Libre Caslon Display"/>
+                <a:latin typeface="Georgia"/>
               </a:rPr>
               <a:t>Swap jobs</a:t>
             </a:r>
@@ -15781,7 +15781,7 @@
                 <a:solidFill>
                   <a:srgbClr val="5C6552"/>
                 </a:solidFill>
-                <a:latin typeface="Karla"/>
+                <a:latin typeface="Calibri"/>
               </a:rPr>
               <a:t>Last round’s drawer now faces the board and describes. Last round’s describer turns round and draws.</a:t>
             </a:r>
@@ -15958,7 +15958,7 @@
                 <a:solidFill>
                   <a:srgbClr val="FFFDF7"/>
                 </a:solidFill>
-                <a:latin typeface="Karla"/>
+                <a:latin typeface="Calibri"/>
               </a:rPr>
               <a:t>2</a:t>
             </a:r>
@@ -15997,11 +15997,11 @@
               </a:spcAft>
             </a:pPr>
             <a:r>
-              <a:rPr sz="1600" b="1" i="0">
+              <a:rPr sz="1600" b="0" i="0">
                 <a:solidFill>
                   <a:srgbClr val="265C92"/>
                 </a:solidFill>
-                <a:latin typeface="Libre Caslon Display"/>
+                <a:latin typeface="Georgia"/>
               </a:rPr>
               <a:t>This time</a:t>
             </a:r>
@@ -16044,7 +16044,7 @@
                 <a:solidFill>
                   <a:srgbClr val="5C6552"/>
                 </a:solidFill>
-                <a:latin typeface="Karla"/>
+                <a:latin typeface="Calibri"/>
               </a:rPr>
               <a:t>The drawer can ask as many questions as they like, and there is still no pointing. You have three minutes again.</a:t>
             </a:r>
@@ -16087,7 +16087,7 @@
                 <a:solidFill>
                   <a:srgbClr val="265C92"/>
                 </a:solidFill>
-                <a:latin typeface="Karla"/>
+                <a:latin typeface="Calibri"/>
               </a:rPr>
               <a:t>Keep your round one drawing. You will need it at the end.</a:t>
             </a:r>
@@ -16155,7 +16155,7 @@
                 <a:solidFill>
                   <a:srgbClr val="8B9179"/>
                 </a:solidFill>
-                <a:latin typeface="Karla"/>
+                <a:latin typeface="Calibri"/>
               </a:rPr>
               <a:t>The Pastoral Guide</a:t>
             </a:r>
@@ -16198,7 +16198,7 @@
                 <a:solidFill>
                   <a:srgbClr val="8B9179"/>
                 </a:solidFill>
-                <a:latin typeface="Karla"/>
+                <a:latin typeface="Calibri"/>
               </a:rPr>
               <a:t>26 / 35</a:t>
             </a:r>
@@ -16315,7 +16315,7 @@
                 <a:solidFill>
                   <a:srgbClr val="FFFDF7"/>
                 </a:solidFill>
-                <a:latin typeface="Karla"/>
+                <a:latin typeface="Calibri"/>
               </a:rPr>
               <a:t>ROUND TWO  ·  DESCRIBERS ONLY</a:t>
             </a:r>
@@ -16408,7 +16408,7 @@
                 <a:solidFill>
                   <a:srgbClr val="8B9179"/>
                 </a:solidFill>
-                <a:latin typeface="Karla"/>
+                <a:latin typeface="Calibri"/>
               </a:rPr>
               <a:t>The Pastoral Guide</a:t>
             </a:r>
@@ -16451,7 +16451,7 @@
                 <a:solidFill>
                   <a:srgbClr val="8B9179"/>
                 </a:solidFill>
-                <a:latin typeface="Karla"/>
+                <a:latin typeface="Calibri"/>
               </a:rPr>
               <a:t>27 / 35</a:t>
             </a:r>
@@ -16520,61 +16520,6 @@
           </a:p>
         </p:txBody>
       </p:sp>
-      <p:sp>
-        <p:nvSpPr>
-          <p:cNvPr id="3" name="Rounded Rectangle 2"/>
-          <p:cNvSpPr/>
-          <p:nvPr/>
-        </p:nvSpPr>
-        <p:spPr>
-          <a:xfrm>
-            <a:off x="3749791" y="329184"/>
-            <a:ext cx="1644417" cy="237744"/>
-          </a:xfrm>
-          <a:prstGeom prst="roundRect">
-            <a:avLst>
-              <a:gd name="adj" fmla="val 50000"/>
-            </a:avLst>
-          </a:prstGeom>
-          <a:solidFill>
-            <a:srgbClr val="265C92"/>
-          </a:solidFill>
-          <a:ln>
-            <a:noFill/>
-          </a:ln>
-          <a:effectLst/>
-        </p:spPr>
-        <p:style>
-          <a:lnRef idx="1">
-            <a:schemeClr val="accent1"/>
-          </a:lnRef>
-          <a:fillRef idx="3">
-            <a:schemeClr val="accent1"/>
-          </a:fillRef>
-          <a:effectRef idx="0">
-            <a:schemeClr val="accent1"/>
-          </a:effectRef>
-          <a:fontRef idx="minor">
-            <a:schemeClr val="lt1"/>
-          </a:fontRef>
-        </p:style>
-        <p:txBody>
-          <a:bodyPr rtlCol="0" anchor="ctr" wrap="none" lIns="0" rIns="0" tIns="0" bIns="0"/>
-          <a:lstStyle/>
-          <a:p>
-            <a:pPr algn="ctr"/>
-            <a:r>
-              <a:rPr sz="950" b="1" spc="90">
-                <a:solidFill>
-                  <a:srgbClr val="FFFDF7"/>
-                </a:solidFill>
-                <a:latin typeface="Karla"/>
-              </a:rPr>
-              <a:t>EVERYBODY LOOK</a:t>
-            </a:r>
-          </a:p>
-        </p:txBody>
-      </p:sp>
       <p:pic>
         <p:nvPicPr>
           <p:cNvPr id="4" name="Picture 3" descr="a.png"/>
@@ -16632,11 +16577,11 @@
               </a:spcAft>
             </a:pPr>
             <a:r>
-              <a:rPr sz="1800" b="1" i="0">
+              <a:rPr sz="1800" b="0" i="0">
                 <a:solidFill>
                   <a:srgbClr val="265C92"/>
                 </a:solidFill>
-                <a:latin typeface="Libre Caslon Display"/>
+                <a:latin typeface="Georgia"/>
               </a:rPr>
               <a:t>Round one</a:t>
             </a:r>
@@ -16700,11 +16645,11 @@
               </a:spcAft>
             </a:pPr>
             <a:r>
-              <a:rPr sz="1800" b="1" i="0">
+              <a:rPr sz="1800" b="0" i="0">
                 <a:solidFill>
                   <a:srgbClr val="265C92"/>
                 </a:solidFill>
-                <a:latin typeface="Libre Caslon Display"/>
+                <a:latin typeface="Georgia"/>
               </a:rPr>
               <a:t>Round two</a:t>
             </a:r>
@@ -16747,7 +16692,7 @@
                 <a:solidFill>
                   <a:srgbClr val="5C6552"/>
                 </a:solidFill>
-                <a:latin typeface="Karla"/>
+                <a:latin typeface="Calibri"/>
               </a:rPr>
               <a:t>Put your two drawings side by side. Which one is closer to its picture?</a:t>
             </a:r>
@@ -16815,7 +16760,7 @@
                 <a:solidFill>
                   <a:srgbClr val="8B9179"/>
                 </a:solidFill>
-                <a:latin typeface="Karla"/>
+                <a:latin typeface="Calibri"/>
               </a:rPr>
               <a:t>The Pastoral Guide</a:t>
             </a:r>
@@ -16858,7 +16803,7 @@
                 <a:solidFill>
                   <a:srgbClr val="8B9179"/>
                 </a:solidFill>
-                <a:latin typeface="Karla"/>
+                <a:latin typeface="Calibri"/>
               </a:rPr>
               <a:t>28 / 35</a:t>
             </a:r>
@@ -16963,7 +16908,7 @@
                 <a:solidFill>
                   <a:srgbClr val="265C92"/>
                 </a:solidFill>
-                <a:latin typeface="Karla"/>
+                <a:latin typeface="Calibri"/>
               </a:rPr>
               <a:t>DESCRIBE AND DRAW  ·  TALK ABOUT IT</a:t>
             </a:r>
@@ -17098,11 +17043,11 @@
               </a:spcAft>
             </a:pPr>
             <a:r>
-              <a:rPr sz="2600" b="1" i="0">
+              <a:rPr sz="2231" b="0" i="0">
                 <a:solidFill>
                   <a:srgbClr val="265C92"/>
                 </a:solidFill>
-                <a:latin typeface="Libre Caslon Display"/>
+                <a:latin typeface="Georgia"/>
               </a:rPr>
               <a:t>What did the pair with the closest</a:t>
             </a:r>
@@ -17110,11 +17055,11 @@
               <a:rPr lang="en-GB"/>
             </a:br>
             <a:r>
-              <a:rPr sz="2600" b="1" i="0">
+              <a:rPr sz="2231" b="0" i="0">
                 <a:solidFill>
                   <a:srgbClr val="265C92"/>
                 </a:solidFill>
-                <a:latin typeface="Libre Caslon Display"/>
+                <a:latin typeface="Georgia"/>
               </a:rPr>
               <a:t>drawing actually do?</a:t>
             </a:r>
@@ -17157,7 +17102,7 @@
                 <a:solidFill>
                   <a:srgbClr val="8B9179"/>
                 </a:solidFill>
-                <a:latin typeface="Karla"/>
+                <a:latin typeface="Calibri"/>
               </a:rPr>
               <a:t>THEN ASK</a:t>
             </a:r>
@@ -17244,7 +17189,7 @@
                 <a:solidFill>
                   <a:srgbClr val="2E3436"/>
                 </a:solidFill>
-                <a:latin typeface="Karla"/>
+                <a:latin typeface="Calibri"/>
               </a:rPr>
               <a:t>What did the describer say that made the drawing easier?</a:t>
             </a:r>
@@ -17331,7 +17276,7 @@
                 <a:solidFill>
                   <a:srgbClr val="2E3436"/>
                 </a:solidFill>
-                <a:latin typeface="Karla"/>
+                <a:latin typeface="Calibri"/>
               </a:rPr>
               <a:t>What made a description hard to follow?</a:t>
             </a:r>
@@ -17418,7 +17363,7 @@
                 <a:solidFill>
                   <a:srgbClr val="2E3436"/>
                 </a:solidFill>
-                <a:latin typeface="Karla"/>
+                <a:latin typeface="Calibri"/>
               </a:rPr>
               <a:t>In round two, which question helped the most?</a:t>
             </a:r>
@@ -17486,7 +17431,7 @@
                 <a:solidFill>
                   <a:srgbClr val="8B9179"/>
                 </a:solidFill>
-                <a:latin typeface="Karla"/>
+                <a:latin typeface="Calibri"/>
               </a:rPr>
               <a:t>The Pastoral Guide</a:t>
             </a:r>
@@ -17529,7 +17474,7 @@
                 <a:solidFill>
                   <a:srgbClr val="8B9179"/>
                 </a:solidFill>
-                <a:latin typeface="Karla"/>
+                <a:latin typeface="Calibri"/>
               </a:rPr>
               <a:t>29 / 35</a:t>
             </a:r>
@@ -17646,7 +17591,7 @@
                 <a:solidFill>
                   <a:srgbClr val="265C92"/>
                 </a:solidFill>
-                <a:latin typeface="Karla"/>
+                <a:latin typeface="Calibri"/>
               </a:rPr>
               <a:t>CHALLENGE 1 OF 5</a:t>
             </a:r>
@@ -17754,11 +17699,11 @@
               </a:spcAft>
             </a:pPr>
             <a:r>
-              <a:rPr sz="4400" b="1" i="0">
+              <a:rPr sz="4400" b="0" i="0">
                 <a:solidFill>
                   <a:srgbClr val="FFFDF7"/>
                 </a:solidFill>
-                <a:latin typeface="Libre Caslon Display"/>
+                <a:latin typeface="Georgia"/>
               </a:rPr>
               <a:t>Lost at Sea</a:t>
             </a:r>
@@ -17845,7 +17790,7 @@
                 <a:solidFill>
                   <a:srgbClr val="C2D1E0"/>
                 </a:solidFill>
-                <a:latin typeface="Karla"/>
+                <a:latin typeface="Calibri"/>
               </a:rPr>
               <a:t>Rank ten things by how much they would help you survive at sea, first on your own and then as a team.</a:t>
             </a:r>
@@ -17913,7 +17858,7 @@
                 <a:solidFill>
                   <a:srgbClr val="C2D1E0"/>
                 </a:solidFill>
-                <a:latin typeface="Karla"/>
+                <a:latin typeface="Calibri"/>
               </a:rPr>
               <a:t>The Pastoral Guide</a:t>
             </a:r>
@@ -17956,7 +17901,7 @@
                 <a:solidFill>
                   <a:srgbClr val="C2D1E0"/>
                 </a:solidFill>
-                <a:latin typeface="Karla"/>
+                <a:latin typeface="Calibri"/>
               </a:rPr>
               <a:t>3 / 35</a:t>
             </a:r>
@@ -18073,7 +18018,7 @@
                 <a:solidFill>
                   <a:srgbClr val="265C92"/>
                 </a:solidFill>
-                <a:latin typeface="Karla"/>
+                <a:latin typeface="Calibri"/>
               </a:rPr>
               <a:t>CHALLENGE 5 OF 5</a:t>
             </a:r>
@@ -18181,11 +18126,11 @@
               </a:spcAft>
             </a:pPr>
             <a:r>
-              <a:rPr sz="4400" b="1" i="0">
+              <a:rPr sz="4400" b="0" i="0">
                 <a:solidFill>
                   <a:srgbClr val="FFFDF7"/>
                 </a:solidFill>
-                <a:latin typeface="Libre Caslon Display"/>
+                <a:latin typeface="Georgia"/>
               </a:rPr>
               <a:t>Silent Line-Up</a:t>
             </a:r>
@@ -18272,7 +18217,7 @@
                 <a:solidFill>
                   <a:srgbClr val="C2D1E0"/>
                 </a:solidFill>
-                <a:latin typeface="Karla"/>
+                <a:latin typeface="Calibri"/>
               </a:rPr>
               <a:t>Get your whole team into birthday order without saying a word.</a:t>
             </a:r>
@@ -18340,7 +18285,7 @@
                 <a:solidFill>
                   <a:srgbClr val="C2D1E0"/>
                 </a:solidFill>
-                <a:latin typeface="Karla"/>
+                <a:latin typeface="Calibri"/>
               </a:rPr>
               <a:t>The Pastoral Guide</a:t>
             </a:r>
@@ -18383,7 +18328,7 @@
                 <a:solidFill>
                   <a:srgbClr val="C2D1E0"/>
                 </a:solidFill>
-                <a:latin typeface="Karla"/>
+                <a:latin typeface="Calibri"/>
               </a:rPr>
               <a:t>30 / 35</a:t>
             </a:r>
@@ -18488,7 +18433,7 @@
                 <a:solidFill>
                   <a:srgbClr val="265C92"/>
                 </a:solidFill>
-                <a:latin typeface="Karla"/>
+                <a:latin typeface="Calibri"/>
               </a:rPr>
               <a:t>SILENT LINE-UP  ·  THE RULES</a:t>
             </a:r>
@@ -18527,11 +18472,11 @@
               </a:spcAft>
             </a:pPr>
             <a:r>
-              <a:rPr sz="3000" b="1" i="0">
+              <a:rPr sz="3000" b="0" i="0">
                 <a:solidFill>
                   <a:srgbClr val="265C92"/>
                 </a:solidFill>
-                <a:latin typeface="Libre Caslon Display"/>
+                <a:latin typeface="Georgia"/>
               </a:rPr>
               <a:t>Not a word</a:t>
             </a:r>
@@ -18708,7 +18653,7 @@
                 <a:solidFill>
                   <a:srgbClr val="FFFDF7"/>
                 </a:solidFill>
-                <a:latin typeface="Karla"/>
+                <a:latin typeface="Calibri"/>
               </a:rPr>
               <a:t>1</a:t>
             </a:r>
@@ -18747,11 +18692,11 @@
               </a:spcAft>
             </a:pPr>
             <a:r>
-              <a:rPr sz="1600" b="1" i="0">
+              <a:rPr sz="1600" b="0" i="0">
                 <a:solidFill>
                   <a:srgbClr val="265C92"/>
                 </a:solidFill>
-                <a:latin typeface="Libre Caslon Display"/>
+                <a:latin typeface="Georgia"/>
               </a:rPr>
               <a:t>The order</a:t>
             </a:r>
@@ -18794,7 +18739,7 @@
                 <a:solidFill>
                   <a:srgbClr val="5C6552"/>
                 </a:solidFill>
-                <a:latin typeface="Karla"/>
+                <a:latin typeface="Calibri"/>
               </a:rPr>
               <a:t>Line up by birthday, from 1 January at one end to 31 December at the other.</a:t>
             </a:r>
@@ -18971,7 +18916,7 @@
                 <a:solidFill>
                   <a:srgbClr val="FFFDF7"/>
                 </a:solidFill>
-                <a:latin typeface="Karla"/>
+                <a:latin typeface="Calibri"/>
               </a:rPr>
               <a:t>2</a:t>
             </a:r>
@@ -19010,11 +18955,11 @@
               </a:spcAft>
             </a:pPr>
             <a:r>
-              <a:rPr sz="1600" b="1" i="0">
+              <a:rPr sz="1600" b="0" i="0">
                 <a:solidFill>
                   <a:srgbClr val="265C92"/>
                 </a:solidFill>
-                <a:latin typeface="Libre Caslon Display"/>
+                <a:latin typeface="Georgia"/>
               </a:rPr>
               <a:t>No words</a:t>
             </a:r>
@@ -19057,7 +19002,7 @@
                 <a:solidFill>
                   <a:srgbClr val="5C6552"/>
                 </a:solidFill>
-                <a:latin typeface="Karla"/>
+                <a:latin typeface="Calibri"/>
               </a:rPr>
               <a:t>Nobody speaks, mouths words or writes anything down. Using your hands is fine.</a:t>
             </a:r>
@@ -19234,7 +19179,7 @@
                 <a:solidFill>
                   <a:srgbClr val="FFFDF7"/>
                 </a:solidFill>
-                <a:latin typeface="Karla"/>
+                <a:latin typeface="Calibri"/>
               </a:rPr>
               <a:t>3</a:t>
             </a:r>
@@ -19273,11 +19218,11 @@
               </a:spcAft>
             </a:pPr>
             <a:r>
-              <a:rPr sz="1600" b="1" i="0">
+              <a:rPr sz="1600" b="0" i="0">
                 <a:solidFill>
                   <a:srgbClr val="265C92"/>
                 </a:solidFill>
-                <a:latin typeface="Libre Caslon Display"/>
+                <a:latin typeface="Georgia"/>
               </a:rPr>
               <a:t>Done</a:t>
             </a:r>
@@ -19320,7 +19265,7 @@
                 <a:solidFill>
                   <a:srgbClr val="5C6552"/>
                 </a:solidFill>
-                <a:latin typeface="Karla"/>
+                <a:latin typeface="Calibri"/>
               </a:rPr>
               <a:t>When your team is in order, everyone folds their arms. The first team in the right order wins.</a:t>
             </a:r>
@@ -19388,7 +19333,7 @@
                 <a:solidFill>
                   <a:srgbClr val="8B9179"/>
                 </a:solidFill>
-                <a:latin typeface="Karla"/>
+                <a:latin typeface="Calibri"/>
               </a:rPr>
               <a:t>The Pastoral Guide</a:t>
             </a:r>
@@ -19431,7 +19376,7 @@
                 <a:solidFill>
                   <a:srgbClr val="8B9179"/>
                 </a:solidFill>
-                <a:latin typeface="Karla"/>
+                <a:latin typeface="Calibri"/>
               </a:rPr>
               <a:t>31 / 35</a:t>
             </a:r>
@@ -19536,7 +19481,7 @@
                 <a:solidFill>
                   <a:srgbClr val="265C92"/>
                 </a:solidFill>
-                <a:latin typeface="Karla"/>
+                <a:latin typeface="Calibri"/>
               </a:rPr>
               <a:t>SILENT LINE-UP</a:t>
             </a:r>
@@ -19591,7 +19536,7 @@
                 <a:solidFill>
                   <a:srgbClr val="FFFDF7"/>
                 </a:solidFill>
-                <a:latin typeface="Karla"/>
+                <a:latin typeface="Calibri"/>
               </a:rPr>
               <a:t>CHECK</a:t>
             </a:r>
@@ -19630,11 +19575,11 @@
               </a:spcAft>
             </a:pPr>
             <a:r>
-              <a:rPr sz="4400" b="1" i="0">
+              <a:rPr sz="4400" b="0" i="0">
                 <a:solidFill>
                   <a:srgbClr val="265C92"/>
                 </a:solidFill>
-                <a:latin typeface="Libre Caslon Display"/>
+                <a:latin typeface="Georgia"/>
               </a:rPr>
               <a:t>Check it out loud</a:t>
             </a:r>
@@ -19721,7 +19666,7 @@
                 <a:solidFill>
                   <a:srgbClr val="5C6552"/>
                 </a:solidFill>
-                <a:latin typeface="Karla"/>
+                <a:latin typeface="Calibri"/>
               </a:rPr>
               <a:t>Starting at the January end, each person says their birthday out loud. Is anybody in the wrong place?</a:t>
             </a:r>
@@ -19789,7 +19734,7 @@
                 <a:solidFill>
                   <a:srgbClr val="8B9179"/>
                 </a:solidFill>
-                <a:latin typeface="Karla"/>
+                <a:latin typeface="Calibri"/>
               </a:rPr>
               <a:t>The Pastoral Guide</a:t>
             </a:r>
@@ -19832,7 +19777,7 @@
                 <a:solidFill>
                   <a:srgbClr val="8B9179"/>
                 </a:solidFill>
-                <a:latin typeface="Karla"/>
+                <a:latin typeface="Calibri"/>
               </a:rPr>
               <a:t>32 / 35</a:t>
             </a:r>
@@ -19937,7 +19882,7 @@
                 <a:solidFill>
                   <a:srgbClr val="265C92"/>
                 </a:solidFill>
-                <a:latin typeface="Karla"/>
+                <a:latin typeface="Calibri"/>
               </a:rPr>
               <a:t>SILENT LINE-UP</a:t>
             </a:r>
@@ -19992,7 +19937,7 @@
                 <a:solidFill>
                   <a:srgbClr val="FFFDF7"/>
                 </a:solidFill>
-                <a:latin typeface="Karla"/>
+                <a:latin typeface="Calibri"/>
               </a:rPr>
               <a:t>AGAIN</a:t>
             </a:r>
@@ -20031,11 +19976,11 @@
               </a:spcAft>
             </a:pPr>
             <a:r>
-              <a:rPr sz="4400" b="1" i="0">
+              <a:rPr sz="4400" b="0" i="0">
                 <a:solidFill>
                   <a:srgbClr val="265C92"/>
                 </a:solidFill>
-                <a:latin typeface="Libre Caslon Display"/>
+                <a:latin typeface="Georgia"/>
               </a:rPr>
               <a:t>Round two</a:t>
             </a:r>
@@ -20122,7 +20067,7 @@
                 <a:solidFill>
                   <a:srgbClr val="5C6552"/>
                 </a:solidFill>
-                <a:latin typeface="Karla"/>
+                <a:latin typeface="Calibri"/>
               </a:rPr>
               <a:t>Now do it again, in alphabetical order of your first names. The same rules apply.</a:t>
             </a:r>
@@ -20190,7 +20135,7 @@
                 <a:solidFill>
                   <a:srgbClr val="8B9179"/>
                 </a:solidFill>
-                <a:latin typeface="Karla"/>
+                <a:latin typeface="Calibri"/>
               </a:rPr>
               <a:t>The Pastoral Guide</a:t>
             </a:r>
@@ -20233,7 +20178,7 @@
                 <a:solidFill>
                   <a:srgbClr val="8B9179"/>
                 </a:solidFill>
-                <a:latin typeface="Karla"/>
+                <a:latin typeface="Calibri"/>
               </a:rPr>
               <a:t>33 / 35</a:t>
             </a:r>
@@ -20338,7 +20283,7 @@
                 <a:solidFill>
                   <a:srgbClr val="265C92"/>
                 </a:solidFill>
-                <a:latin typeface="Karla"/>
+                <a:latin typeface="Calibri"/>
               </a:rPr>
               <a:t>SILENT LINE-UP  ·  TALK ABOUT IT</a:t>
             </a:r>
@@ -20473,11 +20418,11 @@
               </a:spcAft>
             </a:pPr>
             <a:r>
-              <a:rPr sz="2600" b="1" i="0">
+              <a:rPr sz="2600" b="0" i="0">
                 <a:solidFill>
                   <a:srgbClr val="265C92"/>
                 </a:solidFill>
-                <a:latin typeface="Libre Caslon Display"/>
+                <a:latin typeface="Georgia"/>
               </a:rPr>
               <a:t>What did the team that did best</a:t>
             </a:r>
@@ -20485,11 +20430,11 @@
               <a:rPr lang="en-GB"/>
             </a:br>
             <a:r>
-              <a:rPr sz="2600" b="1" i="0">
+              <a:rPr sz="2600" b="0" i="0">
                 <a:solidFill>
                   <a:srgbClr val="265C92"/>
                 </a:solidFill>
-                <a:latin typeface="Libre Caslon Display"/>
+                <a:latin typeface="Georgia"/>
               </a:rPr>
               <a:t>actually do?</a:t>
             </a:r>
@@ -20532,7 +20477,7 @@
                 <a:solidFill>
                   <a:srgbClr val="8B9179"/>
                 </a:solidFill>
-                <a:latin typeface="Karla"/>
+                <a:latin typeface="Calibri"/>
               </a:rPr>
               <a:t>THEN ASK</a:t>
             </a:r>
@@ -20619,7 +20564,7 @@
                 <a:solidFill>
                   <a:srgbClr val="2E3436"/>
                 </a:solidFill>
-                <a:latin typeface="Karla"/>
+                <a:latin typeface="Calibri"/>
               </a:rPr>
               <a:t>How did your team get birthdays across without any words?</a:t>
             </a:r>
@@ -20706,7 +20651,7 @@
                 <a:solidFill>
                   <a:srgbClr val="2E3436"/>
                 </a:solidFill>
-                <a:latin typeface="Karla"/>
+                <a:latin typeface="Calibri"/>
               </a:rPr>
               <a:t>Did somebody take charge? Did the team decide that, or did it just happen?</a:t>
             </a:r>
@@ -20793,7 +20738,7 @@
                 <a:solidFill>
                   <a:srgbClr val="2E3436"/>
                 </a:solidFill>
-                <a:latin typeface="Karla"/>
+                <a:latin typeface="Calibri"/>
               </a:rPr>
               <a:t>What would have made it faster?</a:t>
             </a:r>
@@ -20861,7 +20806,7 @@
                 <a:solidFill>
                   <a:srgbClr val="8B9179"/>
                 </a:solidFill>
-                <a:latin typeface="Karla"/>
+                <a:latin typeface="Calibri"/>
               </a:rPr>
               <a:t>The Pastoral Guide</a:t>
             </a:r>
@@ -20904,7 +20849,7 @@
                 <a:solidFill>
                   <a:srgbClr val="8B9179"/>
                 </a:solidFill>
-                <a:latin typeface="Karla"/>
+                <a:latin typeface="Calibri"/>
               </a:rPr>
               <a:t>34 / 35</a:t>
             </a:r>
@@ -21009,7 +20954,7 @@
                 <a:solidFill>
                   <a:srgbClr val="265C92"/>
                 </a:solidFill>
-                <a:latin typeface="Karla"/>
+                <a:latin typeface="Calibri"/>
               </a:rPr>
               <a:t>TEAM CHALLENGES  ·  VOLUME ONE</a:t>
             </a:r>
@@ -21073,11 +21018,11 @@
               </a:spcAft>
             </a:pPr>
             <a:r>
-              <a:rPr sz="3200" b="1" i="0">
+              <a:rPr sz="3200" b="0" i="0">
                 <a:solidFill>
                   <a:srgbClr val="265C92"/>
                 </a:solidFill>
-                <a:latin typeface="Libre Caslon Display"/>
+                <a:latin typeface="Georgia"/>
               </a:rPr>
               <a:t>The end of Volume One</a:t>
             </a:r>
@@ -21120,7 +21065,7 @@
                 <a:solidFill>
                   <a:srgbClr val="5C6552"/>
                 </a:solidFill>
-                <a:latin typeface="Karla"/>
+                <a:latin typeface="Calibri"/>
               </a:rPr>
               <a:t>Which challenge has your form done best at so far, and which would you like to do again? Volume Two is on the way.</a:t>
             </a:r>
@@ -21163,7 +21108,7 @@
                 <a:solidFill>
                   <a:srgbClr val="8B9179"/>
                 </a:solidFill>
-                <a:latin typeface="Karla"/>
+                <a:latin typeface="Calibri"/>
               </a:rPr>
               <a:t>More free form time activities at thepastoralguide.com.</a:t>
             </a:r>
@@ -21231,7 +21176,7 @@
                 <a:solidFill>
                   <a:srgbClr val="8B9179"/>
                 </a:solidFill>
-                <a:latin typeface="Karla"/>
+                <a:latin typeface="Calibri"/>
               </a:rPr>
               <a:t>The Pastoral Guide</a:t>
             </a:r>
@@ -21274,7 +21219,7 @@
                 <a:solidFill>
                   <a:srgbClr val="8B9179"/>
                 </a:solidFill>
-                <a:latin typeface="Karla"/>
+                <a:latin typeface="Calibri"/>
               </a:rPr>
               <a:t>35 / 35</a:t>
             </a:r>
@@ -21379,7 +21324,7 @@
                 <a:solidFill>
                   <a:srgbClr val="265C92"/>
                 </a:solidFill>
-                <a:latin typeface="Karla"/>
+                <a:latin typeface="Calibri"/>
               </a:rPr>
               <a:t>LOST AT SEA  ·  THE STORY</a:t>
             </a:r>
@@ -21422,7 +21367,7 @@
                 <a:solidFill>
                   <a:srgbClr val="2E3436"/>
                 </a:solidFill>
-                <a:latin typeface="Karla"/>
+                <a:latin typeface="Calibri"/>
               </a:rPr>
               <a:t>Your sailing boat has sunk. Everyone is in the life raft, which has no roof, no engine and no oars. It is cold, land is days away, and nobody knows where you are.</a:t>
             </a:r>
@@ -21465,7 +21410,7 @@
                 <a:solidFill>
                   <a:srgbClr val="265C92"/>
                 </a:solidFill>
-                <a:latin typeface="Karla"/>
+                <a:latin typeface="Calibri"/>
               </a:rPr>
               <a:t>The raft holds the ten things below. Number them from 1, the most useful for getting home safely, to 10, the least useful.</a:t>
             </a:r>
@@ -21598,7 +21543,7 @@
                 <a:solidFill>
                   <a:srgbClr val="FFFDF7"/>
                 </a:solidFill>
-                <a:latin typeface="Karla"/>
+                <a:latin typeface="Calibri"/>
               </a:rPr>
               <a:t>A</a:t>
             </a:r>
@@ -21641,7 +21586,7 @@
                 <a:solidFill>
                   <a:srgbClr val="2E3436"/>
                 </a:solidFill>
-                <a:latin typeface="Karla"/>
+                <a:latin typeface="Calibri"/>
               </a:rPr>
               <a:t>A large plastic sheet</a:t>
             </a:r>
@@ -21774,7 +21719,7 @@
                 <a:solidFill>
                   <a:srgbClr val="FFFDF7"/>
                 </a:solidFill>
-                <a:latin typeface="Karla"/>
+                <a:latin typeface="Calibri"/>
               </a:rPr>
               <a:t>B</a:t>
             </a:r>
@@ -21817,7 +21762,7 @@
                 <a:solidFill>
                   <a:srgbClr val="2E3436"/>
                 </a:solidFill>
-                <a:latin typeface="Karla"/>
+                <a:latin typeface="Calibri"/>
               </a:rPr>
               <a:t>A pack of cards</a:t>
             </a:r>
@@ -21950,7 +21895,7 @@
                 <a:solidFill>
                   <a:srgbClr val="FFFDF7"/>
                 </a:solidFill>
-                <a:latin typeface="Karla"/>
+                <a:latin typeface="Calibri"/>
               </a:rPr>
               <a:t>C</a:t>
             </a:r>
@@ -21993,7 +21938,7 @@
                 <a:solidFill>
                   <a:srgbClr val="2E3436"/>
                 </a:solidFill>
-                <a:latin typeface="Karla"/>
+                <a:latin typeface="Calibri"/>
               </a:rPr>
               <a:t>Dry, warm clothes for everyone</a:t>
             </a:r>
@@ -22126,7 +22071,7 @@
                 <a:solidFill>
                   <a:srgbClr val="FFFDF7"/>
                 </a:solidFill>
-                <a:latin typeface="Karla"/>
+                <a:latin typeface="Calibri"/>
               </a:rPr>
               <a:t>D</a:t>
             </a:r>
@@ -22169,7 +22114,7 @@
                 <a:solidFill>
                   <a:srgbClr val="2E3436"/>
                 </a:solidFill>
-                <a:latin typeface="Karla"/>
+                <a:latin typeface="Calibri"/>
               </a:rPr>
               <a:t>A bar of chocolate each</a:t>
             </a:r>
@@ -22302,7 +22247,7 @@
                 <a:solidFill>
                   <a:srgbClr val="FFFDF7"/>
                 </a:solidFill>
-                <a:latin typeface="Karla"/>
+                <a:latin typeface="Calibri"/>
               </a:rPr>
               <a:t>E</a:t>
             </a:r>
@@ -22345,7 +22290,7 @@
                 <a:solidFill>
                   <a:srgbClr val="2E3436"/>
                 </a:solidFill>
-                <a:latin typeface="Karla"/>
+                <a:latin typeface="Calibri"/>
               </a:rPr>
               <a:t>A small mirror</a:t>
             </a:r>
@@ -22478,7 +22423,7 @@
                 <a:solidFill>
                   <a:srgbClr val="FFFDF7"/>
                 </a:solidFill>
-                <a:latin typeface="Karla"/>
+                <a:latin typeface="Calibri"/>
               </a:rPr>
               <a:t>F</a:t>
             </a:r>
@@ -22521,7 +22466,7 @@
                 <a:solidFill>
                   <a:srgbClr val="2E3436"/>
                 </a:solidFill>
-                <a:latin typeface="Karla"/>
+                <a:latin typeface="Calibri"/>
               </a:rPr>
               <a:t>A map of the ocean</a:t>
             </a:r>
@@ -22654,7 +22599,7 @@
                 <a:solidFill>
                   <a:srgbClr val="FFFDF7"/>
                 </a:solidFill>
-                <a:latin typeface="Karla"/>
+                <a:latin typeface="Calibri"/>
               </a:rPr>
               <a:t>G</a:t>
             </a:r>
@@ -22697,7 +22642,7 @@
                 <a:solidFill>
                   <a:srgbClr val="2E3436"/>
                 </a:solidFill>
-                <a:latin typeface="Karla"/>
+                <a:latin typeface="Calibri"/>
               </a:rPr>
               <a:t>Three distress flares</a:t>
             </a:r>
@@ -22830,7 +22775,7 @@
                 <a:solidFill>
                   <a:srgbClr val="FFFDF7"/>
                 </a:solidFill>
-                <a:latin typeface="Karla"/>
+                <a:latin typeface="Calibri"/>
               </a:rPr>
               <a:t>H</a:t>
             </a:r>
@@ -22873,7 +22818,7 @@
                 <a:solidFill>
                   <a:srgbClr val="2E3436"/>
                 </a:solidFill>
-                <a:latin typeface="Karla"/>
+                <a:latin typeface="Calibri"/>
               </a:rPr>
               <a:t>A torch</a:t>
             </a:r>
@@ -23006,7 +22951,7 @@
                 <a:solidFill>
                   <a:srgbClr val="FFFDF7"/>
                 </a:solidFill>
-                <a:latin typeface="Karla"/>
+                <a:latin typeface="Calibri"/>
               </a:rPr>
               <a:t>I</a:t>
             </a:r>
@@ -23049,7 +22994,7 @@
                 <a:solidFill>
                   <a:srgbClr val="2E3436"/>
                 </a:solidFill>
-                <a:latin typeface="Karla"/>
+                <a:latin typeface="Calibri"/>
               </a:rPr>
               <a:t>A fishing line and hooks</a:t>
             </a:r>
@@ -23182,7 +23127,7 @@
                 <a:solidFill>
                   <a:srgbClr val="FFFDF7"/>
                 </a:solidFill>
-                <a:latin typeface="Karla"/>
+                <a:latin typeface="Calibri"/>
               </a:rPr>
               <a:t>J</a:t>
             </a:r>
@@ -23225,7 +23170,7 @@
                 <a:solidFill>
                   <a:srgbClr val="2E3436"/>
                 </a:solidFill>
-                <a:latin typeface="Karla"/>
+                <a:latin typeface="Calibri"/>
               </a:rPr>
               <a:t>Ten litres of drinking water</a:t>
             </a:r>
@@ -23293,7 +23238,7 @@
                 <a:solidFill>
                   <a:srgbClr val="8B9179"/>
                 </a:solidFill>
-                <a:latin typeface="Karla"/>
+                <a:latin typeface="Calibri"/>
               </a:rPr>
               <a:t>The Pastoral Guide</a:t>
             </a:r>
@@ -23336,7 +23281,7 @@
                 <a:solidFill>
                   <a:srgbClr val="8B9179"/>
                 </a:solidFill>
-                <a:latin typeface="Karla"/>
+                <a:latin typeface="Calibri"/>
               </a:rPr>
               <a:t>4 / 35</a:t>
             </a:r>
@@ -23441,64 +23386,9 @@
                 <a:solidFill>
                   <a:srgbClr val="265C92"/>
                 </a:solidFill>
-                <a:latin typeface="Karla"/>
+                <a:latin typeface="Calibri"/>
               </a:rPr>
               <a:t>LOST AT SEA  ·  STEP ONE</a:t>
-            </a:r>
-          </a:p>
-        </p:txBody>
-      </p:sp>
-      <p:sp>
-        <p:nvSpPr>
-          <p:cNvPr id="4" name="Rounded Rectangle 3"/>
-          <p:cNvSpPr/>
-          <p:nvPr/>
-        </p:nvSpPr>
-        <p:spPr>
-          <a:xfrm>
-            <a:off x="685800" y="640080"/>
-            <a:ext cx="1402042" cy="237744"/>
-          </a:xfrm>
-          <a:prstGeom prst="roundRect">
-            <a:avLst>
-              <a:gd name="adj" fmla="val 50000"/>
-            </a:avLst>
-          </a:prstGeom>
-          <a:solidFill>
-            <a:srgbClr val="F0F4F7"/>
-          </a:solidFill>
-          <a:ln>
-            <a:noFill/>
-          </a:ln>
-          <a:effectLst/>
-        </p:spPr>
-        <p:style>
-          <a:lnRef idx="1">
-            <a:schemeClr val="accent1"/>
-          </a:lnRef>
-          <a:fillRef idx="3">
-            <a:schemeClr val="accent1"/>
-          </a:fillRef>
-          <a:effectRef idx="0">
-            <a:schemeClr val="accent1"/>
-          </a:effectRef>
-          <a:fontRef idx="minor">
-            <a:schemeClr val="lt1"/>
-          </a:fontRef>
-        </p:style>
-        <p:txBody>
-          <a:bodyPr rtlCol="0" anchor="ctr" wrap="none" lIns="0" rIns="0" tIns="0" bIns="0"/>
-          <a:lstStyle/>
-          <a:p>
-            <a:pPr algn="ctr"/>
-            <a:r>
-              <a:rPr sz="950" b="1" spc="90">
-                <a:solidFill>
-                  <a:srgbClr val="265C92"/>
-                </a:solidFill>
-                <a:latin typeface="Karla"/>
-              </a:rPr>
-              <a:t>ON YOUR OWN</a:t>
             </a:r>
           </a:p>
         </p:txBody>
@@ -23535,11 +23425,11 @@
               </a:spcAft>
             </a:pPr>
             <a:r>
-              <a:rPr sz="3000" b="1" i="0">
+              <a:rPr sz="3000" b="0" i="0">
                 <a:solidFill>
                   <a:srgbClr val="265C92"/>
                 </a:solidFill>
-                <a:latin typeface="Libre Caslon Display"/>
+                <a:latin typeface="Georgia"/>
               </a:rPr>
               <a:t>Your own answer first</a:t>
             </a:r>
@@ -23716,7 +23606,7 @@
                 <a:solidFill>
                   <a:srgbClr val="FFFDF7"/>
                 </a:solidFill>
-                <a:latin typeface="Karla"/>
+                <a:latin typeface="Calibri"/>
               </a:rPr>
               <a:t>1</a:t>
             </a:r>
@@ -23755,11 +23645,11 @@
               </a:spcAft>
             </a:pPr>
             <a:r>
-              <a:rPr sz="1600" b="1" i="0">
+              <a:rPr sz="1600" b="0" i="0">
                 <a:solidFill>
                   <a:srgbClr val="265C92"/>
                 </a:solidFill>
-                <a:latin typeface="Libre Caslon Display"/>
+                <a:latin typeface="Georgia"/>
               </a:rPr>
               <a:t>Rank all ten</a:t>
             </a:r>
@@ -23802,7 +23692,7 @@
                 <a:solidFill>
                   <a:srgbClr val="5C6552"/>
                 </a:solidFill>
-                <a:latin typeface="Karla"/>
+                <a:latin typeface="Calibri"/>
               </a:rPr>
               <a:t>1 is the most useful and 10 the least. Use every number once.</a:t>
             </a:r>
@@ -23979,7 +23869,7 @@
                 <a:solidFill>
                   <a:srgbClr val="FFFDF7"/>
                 </a:solidFill>
-                <a:latin typeface="Karla"/>
+                <a:latin typeface="Calibri"/>
               </a:rPr>
               <a:t>2</a:t>
             </a:r>
@@ -24018,11 +23908,11 @@
               </a:spcAft>
             </a:pPr>
             <a:r>
-              <a:rPr sz="1600" b="1" i="0">
+              <a:rPr sz="1600" b="0" i="0">
                 <a:solidFill>
                   <a:srgbClr val="265C92"/>
                 </a:solidFill>
-                <a:latin typeface="Libre Caslon Display"/>
+                <a:latin typeface="Georgia"/>
               </a:rPr>
               <a:t>Write them in the Me column</a:t>
             </a:r>
@@ -24065,7 +23955,7 @@
                 <a:solidFill>
                   <a:srgbClr val="5C6552"/>
                 </a:solidFill>
-                <a:latin typeface="Karla"/>
+                <a:latin typeface="Calibri"/>
               </a:rPr>
               <a:t>Write your numbers on your sheet, beside each letter.</a:t>
             </a:r>
@@ -24242,7 +24132,7 @@
                 <a:solidFill>
                   <a:srgbClr val="FFFDF7"/>
                 </a:solidFill>
-                <a:latin typeface="Karla"/>
+                <a:latin typeface="Calibri"/>
               </a:rPr>
               <a:t>3</a:t>
             </a:r>
@@ -24281,11 +24171,11 @@
               </a:spcAft>
             </a:pPr>
             <a:r>
-              <a:rPr sz="1600" b="1" i="0">
+              <a:rPr sz="1600" b="0" i="0">
                 <a:solidFill>
                   <a:srgbClr val="265C92"/>
                 </a:solidFill>
-                <a:latin typeface="Libre Caslon Display"/>
+                <a:latin typeface="Georgia"/>
               </a:rPr>
               <a:t>No talking yet</a:t>
             </a:r>
@@ -24328,7 +24218,7 @@
                 <a:solidFill>
                   <a:srgbClr val="5C6552"/>
                 </a:solidFill>
-                <a:latin typeface="Karla"/>
+                <a:latin typeface="Calibri"/>
               </a:rPr>
               <a:t>This is your answer, before you hear anybody else’s.</a:t>
             </a:r>
@@ -24396,7 +24286,7 @@
                 <a:solidFill>
                   <a:srgbClr val="8B9179"/>
                 </a:solidFill>
-                <a:latin typeface="Karla"/>
+                <a:latin typeface="Calibri"/>
               </a:rPr>
               <a:t>The Pastoral Guide</a:t>
             </a:r>
@@ -24439,7 +24329,7 @@
                 <a:solidFill>
                   <a:srgbClr val="8B9179"/>
                 </a:solidFill>
-                <a:latin typeface="Karla"/>
+                <a:latin typeface="Calibri"/>
               </a:rPr>
               <a:t>5 / 35</a:t>
             </a:r>
@@ -24544,64 +24434,9 @@
                 <a:solidFill>
                   <a:srgbClr val="265C92"/>
                 </a:solidFill>
-                <a:latin typeface="Karla"/>
+                <a:latin typeface="Calibri"/>
               </a:rPr>
               <a:t>LOST AT SEA  ·  STEP TWO</a:t>
-            </a:r>
-          </a:p>
-        </p:txBody>
-      </p:sp>
-      <p:sp>
-        <p:nvSpPr>
-          <p:cNvPr id="4" name="Rounded Rectangle 3"/>
-          <p:cNvSpPr/>
-          <p:nvPr/>
-        </p:nvSpPr>
-        <p:spPr>
-          <a:xfrm>
-            <a:off x="685800" y="640080"/>
-            <a:ext cx="1120768" cy="237744"/>
-          </a:xfrm>
-          <a:prstGeom prst="roundRect">
-            <a:avLst>
-              <a:gd name="adj" fmla="val 50000"/>
-            </a:avLst>
-          </a:prstGeom>
-          <a:solidFill>
-            <a:srgbClr val="F0F4F7"/>
-          </a:solidFill>
-          <a:ln>
-            <a:noFill/>
-          </a:ln>
-          <a:effectLst/>
-        </p:spPr>
-        <p:style>
-          <a:lnRef idx="1">
-            <a:schemeClr val="accent1"/>
-          </a:lnRef>
-          <a:fillRef idx="3">
-            <a:schemeClr val="accent1"/>
-          </a:fillRef>
-          <a:effectRef idx="0">
-            <a:schemeClr val="accent1"/>
-          </a:effectRef>
-          <a:fontRef idx="minor">
-            <a:schemeClr val="lt1"/>
-          </a:fontRef>
-        </p:style>
-        <p:txBody>
-          <a:bodyPr rtlCol="0" anchor="ctr" wrap="none" lIns="0" rIns="0" tIns="0" bIns="0"/>
-          <a:lstStyle/>
-          <a:p>
-            <a:pPr algn="ctr"/>
-            <a:r>
-              <a:rPr sz="950" b="1" spc="90">
-                <a:solidFill>
-                  <a:srgbClr val="265C92"/>
-                </a:solidFill>
-                <a:latin typeface="Karla"/>
-              </a:rPr>
-              <a:t>AS A TEAM</a:t>
             </a:r>
           </a:p>
         </p:txBody>
@@ -24638,11 +24473,11 @@
               </a:spcAft>
             </a:pPr>
             <a:r>
-              <a:rPr sz="3000" b="1" i="0">
+              <a:rPr sz="3000" b="0" i="0">
                 <a:solidFill>
                   <a:srgbClr val="265C92"/>
                 </a:solidFill>
-                <a:latin typeface="Libre Caslon Display"/>
+                <a:latin typeface="Georgia"/>
               </a:rPr>
               <a:t>Now agree one order</a:t>
             </a:r>
@@ -24819,7 +24654,7 @@
                 <a:solidFill>
                   <a:srgbClr val="FFFDF7"/>
                 </a:solidFill>
-                <a:latin typeface="Karla"/>
+                <a:latin typeface="Calibri"/>
               </a:rPr>
               <a:t>1</a:t>
             </a:r>
@@ -24858,11 +24693,11 @@
               </a:spcAft>
             </a:pPr>
             <a:r>
-              <a:rPr sz="1600" b="1" i="0">
+              <a:rPr sz="1600" b="0" i="0">
                 <a:solidFill>
                   <a:srgbClr val="265C92"/>
                 </a:solidFill>
-                <a:latin typeface="Libre Caslon Display"/>
+                <a:latin typeface="Georgia"/>
               </a:rPr>
               <a:t>Talk it through</a:t>
             </a:r>
@@ -24905,7 +24740,7 @@
                 <a:solidFill>
                   <a:srgbClr val="5C6552"/>
                 </a:solidFill>
-                <a:latin typeface="Karla"/>
+                <a:latin typeface="Calibri"/>
               </a:rPr>
               <a:t>Keep going until the whole team can live with the order.</a:t>
             </a:r>
@@ -25082,7 +24917,7 @@
                 <a:solidFill>
                   <a:srgbClr val="FFFDF7"/>
                 </a:solidFill>
-                <a:latin typeface="Karla"/>
+                <a:latin typeface="Calibri"/>
               </a:rPr>
               <a:t>2</a:t>
             </a:r>
@@ -25121,11 +24956,11 @@
               </a:spcAft>
             </a:pPr>
             <a:r>
-              <a:rPr sz="1600" b="1" i="0">
+              <a:rPr sz="1600" b="0" i="0">
                 <a:solidFill>
                   <a:srgbClr val="265C92"/>
                 </a:solidFill>
-                <a:latin typeface="Libre Caslon Display"/>
+                <a:latin typeface="Georgia"/>
               </a:rPr>
               <a:t>Write it in the Team column</a:t>
             </a:r>
@@ -25168,7 +25003,7 @@
                 <a:solidFill>
                   <a:srgbClr val="5C6552"/>
                 </a:solidFill>
-                <a:latin typeface="Karla"/>
+                <a:latin typeface="Calibri"/>
               </a:rPr>
               <a:t>Leave your own column as it is.</a:t>
             </a:r>
@@ -25345,7 +25180,7 @@
                 <a:solidFill>
                   <a:srgbClr val="FFFDF7"/>
                 </a:solidFill>
-                <a:latin typeface="Karla"/>
+                <a:latin typeface="Calibri"/>
               </a:rPr>
               <a:t>3</a:t>
             </a:r>
@@ -25384,11 +25219,11 @@
               </a:spcAft>
             </a:pPr>
             <a:r>
-              <a:rPr sz="1600" b="1" i="0">
+              <a:rPr sz="1600" b="0" i="0">
                 <a:solidFill>
                   <a:srgbClr val="265C92"/>
                 </a:solidFill>
-                <a:latin typeface="Libre Caslon Display"/>
+                <a:latin typeface="Georgia"/>
               </a:rPr>
               <a:t>No voting</a:t>
             </a:r>
@@ -25431,7 +25266,7 @@
                 <a:solidFill>
                   <a:srgbClr val="5C6552"/>
                 </a:solidFill>
-                <a:latin typeface="Karla"/>
+                <a:latin typeface="Calibri"/>
               </a:rPr>
               <a:t>Try to get there by talking, not by counting hands.</a:t>
             </a:r>
@@ -25499,7 +25334,7 @@
                 <a:solidFill>
                   <a:srgbClr val="8B9179"/>
                 </a:solidFill>
-                <a:latin typeface="Karla"/>
+                <a:latin typeface="Calibri"/>
               </a:rPr>
               <a:t>The Pastoral Guide</a:t>
             </a:r>
@@ -25542,7 +25377,7 @@
                 <a:solidFill>
                   <a:srgbClr val="8B9179"/>
                 </a:solidFill>
-                <a:latin typeface="Karla"/>
+                <a:latin typeface="Calibri"/>
               </a:rPr>
               <a:t>6 / 35</a:t>
             </a:r>
@@ -25647,7 +25482,7 @@
                 <a:solidFill>
                   <a:srgbClr val="265C92"/>
                 </a:solidFill>
-                <a:latin typeface="Karla"/>
+                <a:latin typeface="Calibri"/>
               </a:rPr>
               <a:t>LOST AT SEA  ·  THE ANSWER</a:t>
             </a:r>
@@ -25686,11 +25521,11 @@
               </a:spcAft>
             </a:pPr>
             <a:r>
-              <a:rPr sz="2800" b="1" i="0">
+              <a:rPr sz="2800" b="0" i="0">
                 <a:solidFill>
                   <a:srgbClr val="265C92"/>
                 </a:solidFill>
-                <a:latin typeface="Libre Caslon Display"/>
+                <a:latin typeface="Georgia"/>
               </a:rPr>
               <a:t>The answer, 1 to 5</a:t>
             </a:r>
@@ -25867,7 +25702,7 @@
                 <a:solidFill>
                   <a:srgbClr val="FFFDF7"/>
                 </a:solidFill>
-                <a:latin typeface="Karla"/>
+                <a:latin typeface="Calibri"/>
               </a:rPr>
               <a:t>1</a:t>
             </a:r>
@@ -25906,11 +25741,11 @@
               </a:spcAft>
             </a:pPr>
             <a:r>
-              <a:rPr sz="1300" b="1" i="0">
+              <a:rPr sz="1300" b="0" i="0">
                 <a:solidFill>
                   <a:srgbClr val="265C92"/>
                 </a:solidFill>
-                <a:latin typeface="Libre Caslon Display"/>
+                <a:latin typeface="Georgia"/>
               </a:rPr>
               <a:t>Dry, warm clothes for everyone (C)</a:t>
             </a:r>
@@ -25953,7 +25788,7 @@
                 <a:solidFill>
                   <a:srgbClr val="5C6552"/>
                 </a:solidFill>
-                <a:latin typeface="Karla"/>
+                <a:latin typeface="Calibri"/>
               </a:rPr>
               <a:t>Cold is the biggest danger at sea, so keeping warm comes first.</a:t>
             </a:r>
@@ -26130,7 +25965,7 @@
                 <a:solidFill>
                   <a:srgbClr val="FFFDF7"/>
                 </a:solidFill>
-                <a:latin typeface="Karla"/>
+                <a:latin typeface="Calibri"/>
               </a:rPr>
               <a:t>2</a:t>
             </a:r>
@@ -26169,11 +26004,11 @@
               </a:spcAft>
             </a:pPr>
             <a:r>
-              <a:rPr sz="1300" b="1" i="0">
+              <a:rPr sz="1300" b="0" i="0">
                 <a:solidFill>
                   <a:srgbClr val="265C92"/>
                 </a:solidFill>
-                <a:latin typeface="Libre Caslon Display"/>
+                <a:latin typeface="Georgia"/>
               </a:rPr>
               <a:t>Three distress flares (G)</a:t>
             </a:r>
@@ -26216,7 +26051,7 @@
                 <a:solidFill>
                   <a:srgbClr val="5C6552"/>
                 </a:solidFill>
-                <a:latin typeface="Karla"/>
+                <a:latin typeface="Calibri"/>
               </a:rPr>
               <a:t>Fire one straight away. Keep the other two for when you can see a boat or a plane.</a:t>
             </a:r>
@@ -26393,7 +26228,7 @@
                 <a:solidFill>
                   <a:srgbClr val="FFFDF7"/>
                 </a:solidFill>
-                <a:latin typeface="Karla"/>
+                <a:latin typeface="Calibri"/>
               </a:rPr>
               <a:t>3</a:t>
             </a:r>
@@ -26432,11 +26267,11 @@
               </a:spcAft>
             </a:pPr>
             <a:r>
-              <a:rPr sz="1300" b="1" i="0">
+              <a:rPr sz="1300" b="0" i="0">
                 <a:solidFill>
                   <a:srgbClr val="265C92"/>
                 </a:solidFill>
-                <a:latin typeface="Libre Caslon Display"/>
+                <a:latin typeface="Georgia"/>
               </a:rPr>
               <a:t>A small mirror (E)</a:t>
             </a:r>
@@ -26479,7 +26314,7 @@
                 <a:solidFill>
                   <a:srgbClr val="5C6552"/>
                 </a:solidFill>
-                <a:latin typeface="Karla"/>
+                <a:latin typeface="Calibri"/>
               </a:rPr>
               <a:t>On a sunny day its flash can be seen from miles away, and it never runs out.</a:t>
             </a:r>
@@ -26656,7 +26491,7 @@
                 <a:solidFill>
                   <a:srgbClr val="FFFDF7"/>
                 </a:solidFill>
-                <a:latin typeface="Karla"/>
+                <a:latin typeface="Calibri"/>
               </a:rPr>
               <a:t>4</a:t>
             </a:r>
@@ -26695,11 +26530,11 @@
               </a:spcAft>
             </a:pPr>
             <a:r>
-              <a:rPr sz="1300" b="1" i="0">
+              <a:rPr sz="1300" b="0" i="0">
                 <a:solidFill>
                   <a:srgbClr val="265C92"/>
                 </a:solidFill>
-                <a:latin typeface="Libre Caslon Display"/>
+                <a:latin typeface="Georgia"/>
               </a:rPr>
               <a:t>Ten litres of drinking water (J)</a:t>
             </a:r>
@@ -26742,7 +26577,7 @@
                 <a:solidFill>
                   <a:srgbClr val="5C6552"/>
                 </a:solidFill>
-                <a:latin typeface="Karla"/>
+                <a:latin typeface="Calibri"/>
               </a:rPr>
               <a:t>People can last weeks without food, but only a few days without water.</a:t>
             </a:r>
@@ -26919,7 +26754,7 @@
                 <a:solidFill>
                   <a:srgbClr val="FFFDF7"/>
                 </a:solidFill>
-                <a:latin typeface="Karla"/>
+                <a:latin typeface="Calibri"/>
               </a:rPr>
               <a:t>5</a:t>
             </a:r>
@@ -26958,11 +26793,11 @@
               </a:spcAft>
             </a:pPr>
             <a:r>
-              <a:rPr sz="1300" b="1" i="0">
+              <a:rPr sz="1300" b="0" i="0">
                 <a:solidFill>
                   <a:srgbClr val="265C92"/>
                 </a:solidFill>
-                <a:latin typeface="Libre Caslon Display"/>
+                <a:latin typeface="Georgia"/>
               </a:rPr>
               <a:t>A large plastic sheet (A)</a:t>
             </a:r>
@@ -27005,7 +26840,7 @@
                 <a:solidFill>
                   <a:srgbClr val="5C6552"/>
                 </a:solidFill>
-                <a:latin typeface="Karla"/>
+                <a:latin typeface="Calibri"/>
               </a:rPr>
               <a:t>It catches rainwater to drink, and keeps off the spray and the wind.</a:t>
             </a:r>
@@ -27073,7 +26908,7 @@
                 <a:solidFill>
                   <a:srgbClr val="8B9179"/>
                 </a:solidFill>
-                <a:latin typeface="Karla"/>
+                <a:latin typeface="Calibri"/>
               </a:rPr>
               <a:t>The Pastoral Guide</a:t>
             </a:r>
@@ -27116,7 +26951,7 @@
                 <a:solidFill>
                   <a:srgbClr val="8B9179"/>
                 </a:solidFill>
-                <a:latin typeface="Karla"/>
+                <a:latin typeface="Calibri"/>
               </a:rPr>
               <a:t>7 / 35</a:t>
             </a:r>
@@ -27221,7 +27056,7 @@
                 <a:solidFill>
                   <a:srgbClr val="265C92"/>
                 </a:solidFill>
-                <a:latin typeface="Karla"/>
+                <a:latin typeface="Calibri"/>
               </a:rPr>
               <a:t>LOST AT SEA  ·  THE ANSWER</a:t>
             </a:r>
@@ -27260,11 +27095,11 @@
               </a:spcAft>
             </a:pPr>
             <a:r>
-              <a:rPr sz="2800" b="1" i="0">
+              <a:rPr sz="2800" b="0" i="0">
                 <a:solidFill>
                   <a:srgbClr val="265C92"/>
                 </a:solidFill>
-                <a:latin typeface="Libre Caslon Display"/>
+                <a:latin typeface="Georgia"/>
               </a:rPr>
               <a:t>The answer, 6 to 10</a:t>
             </a:r>
@@ -27441,7 +27276,7 @@
                 <a:solidFill>
                   <a:srgbClr val="FFFDF7"/>
                 </a:solidFill>
-                <a:latin typeface="Karla"/>
+                <a:latin typeface="Calibri"/>
               </a:rPr>
               <a:t>6</a:t>
             </a:r>
@@ -27480,11 +27315,11 @@
               </a:spcAft>
             </a:pPr>
             <a:r>
-              <a:rPr sz="1300" b="1" i="0">
+              <a:rPr sz="1300" b="0" i="0">
                 <a:solidFill>
                   <a:srgbClr val="265C92"/>
                 </a:solidFill>
-                <a:latin typeface="Libre Caslon Display"/>
+                <a:latin typeface="Georgia"/>
               </a:rPr>
               <a:t>A torch (H)</a:t>
             </a:r>
@@ -27527,7 +27362,7 @@
                 <a:solidFill>
                   <a:srgbClr val="5C6552"/>
                 </a:solidFill>
-                <a:latin typeface="Karla"/>
+                <a:latin typeface="Calibri"/>
               </a:rPr>
               <a:t>For signalling at night. Save the battery until you can see or hear something.</a:t>
             </a:r>
@@ -27704,7 +27539,7 @@
                 <a:solidFill>
                   <a:srgbClr val="FFFDF7"/>
                 </a:solidFill>
-                <a:latin typeface="Karla"/>
+                <a:latin typeface="Calibri"/>
               </a:rPr>
               <a:t>7</a:t>
             </a:r>
@@ -27743,11 +27578,11 @@
               </a:spcAft>
             </a:pPr>
             <a:r>
-              <a:rPr sz="1300" b="1" i="0">
+              <a:rPr sz="1300" b="0" i="0">
                 <a:solidFill>
                   <a:srgbClr val="265C92"/>
                 </a:solidFill>
-                <a:latin typeface="Libre Caslon Display"/>
+                <a:latin typeface="Georgia"/>
               </a:rPr>
               <a:t>A bar of chocolate each (D)</a:t>
             </a:r>
@@ -27790,7 +27625,7 @@
                 <a:solidFill>
                   <a:srgbClr val="5C6552"/>
                 </a:solidFill>
-                <a:latin typeface="Karla"/>
+                <a:latin typeface="Calibri"/>
               </a:rPr>
               <a:t>Food keeps spirits up, but only eat when there is water to drink, because digesting food uses water.</a:t>
             </a:r>
@@ -27967,7 +27802,7 @@
                 <a:solidFill>
                   <a:srgbClr val="FFFDF7"/>
                 </a:solidFill>
-                <a:latin typeface="Karla"/>
+                <a:latin typeface="Calibri"/>
               </a:rPr>
               <a:t>8</a:t>
             </a:r>
@@ -28006,11 +27841,11 @@
               </a:spcAft>
             </a:pPr>
             <a:r>
-              <a:rPr sz="1300" b="1" i="0">
+              <a:rPr sz="1300" b="0" i="0">
                 <a:solidFill>
                   <a:srgbClr val="265C92"/>
                 </a:solidFill>
-                <a:latin typeface="Libre Caslon Display"/>
+                <a:latin typeface="Georgia"/>
               </a:rPr>
               <a:t>A fishing line and hooks (I)</a:t>
             </a:r>
@@ -28053,7 +27888,7 @@
                 <a:solidFill>
                   <a:srgbClr val="5C6552"/>
                 </a:solidFill>
-                <a:latin typeface="Karla"/>
+                <a:latin typeface="Calibri"/>
               </a:rPr>
               <a:t>Fish is food, but digesting it takes a lot of water, so it only helps once water is sorted.</a:t>
             </a:r>
@@ -28230,7 +28065,7 @@
                 <a:solidFill>
                   <a:srgbClr val="FFFDF7"/>
                 </a:solidFill>
-                <a:latin typeface="Karla"/>
+                <a:latin typeface="Calibri"/>
               </a:rPr>
               <a:t>9</a:t>
             </a:r>
@@ -28269,11 +28104,11 @@
               </a:spcAft>
             </a:pPr>
             <a:r>
-              <a:rPr sz="1300" b="1" i="0">
+              <a:rPr sz="1300" b="0" i="0">
                 <a:solidFill>
                   <a:srgbClr val="265C92"/>
                 </a:solidFill>
-                <a:latin typeface="Libre Caslon Display"/>
+                <a:latin typeface="Georgia"/>
               </a:rPr>
               <a:t>A pack of cards (B)</a:t>
             </a:r>
@@ -28316,7 +28151,7 @@
                 <a:solidFill>
                   <a:srgbClr val="5C6552"/>
                 </a:solidFill>
-                <a:latin typeface="Karla"/>
+                <a:latin typeface="Calibri"/>
               </a:rPr>
               <a:t>Keeping busy and keeping everyone’s spirits up really does help people survive.</a:t>
             </a:r>
@@ -28493,7 +28328,7 @@
                 <a:solidFill>
                   <a:srgbClr val="FFFDF7"/>
                 </a:solidFill>
-                <a:latin typeface="Karla"/>
+                <a:latin typeface="Calibri"/>
               </a:rPr>
               <a:t>10</a:t>
             </a:r>
@@ -28532,11 +28367,11 @@
               </a:spcAft>
             </a:pPr>
             <a:r>
-              <a:rPr sz="1300" b="1" i="0">
+              <a:rPr sz="1300" b="0" i="0">
                 <a:solidFill>
                   <a:srgbClr val="265C92"/>
                 </a:solidFill>
-                <a:latin typeface="Libre Caslon Display"/>
+                <a:latin typeface="Georgia"/>
               </a:rPr>
               <a:t>A map of the ocean (F)</a:t>
             </a:r>
@@ -28579,7 +28414,7 @@
                 <a:solidFill>
                   <a:srgbClr val="5C6552"/>
                 </a:solidFill>
-                <a:latin typeface="Karla"/>
+                <a:latin typeface="Calibri"/>
               </a:rPr>
               <a:t>With no engine or oars you cannot go anywhere, so knowing where you are helps very little.</a:t>
             </a:r>
@@ -28647,7 +28482,7 @@
                 <a:solidFill>
                   <a:srgbClr val="8B9179"/>
                 </a:solidFill>
-                <a:latin typeface="Karla"/>
+                <a:latin typeface="Calibri"/>
               </a:rPr>
               <a:t>The Pastoral Guide</a:t>
             </a:r>
@@ -28690,7 +28525,7 @@
                 <a:solidFill>
                   <a:srgbClr val="8B9179"/>
                 </a:solidFill>
-                <a:latin typeface="Karla"/>
+                <a:latin typeface="Calibri"/>
               </a:rPr>
               <a:t>8 / 35</a:t>
             </a:r>
@@ -28795,7 +28630,7 @@
                 <a:solidFill>
                   <a:srgbClr val="265C92"/>
                 </a:solidFill>
-                <a:latin typeface="Karla"/>
+                <a:latin typeface="Calibri"/>
               </a:rPr>
               <a:t>LOST AT SEA  ·  SCORE IT</a:t>
             </a:r>
@@ -28834,11 +28669,11 @@
               </a:spcAft>
             </a:pPr>
             <a:r>
-              <a:rPr sz="3000" b="1" i="0">
+              <a:rPr sz="3000" b="0" i="0">
                 <a:solidFill>
                   <a:srgbClr val="265C92"/>
                 </a:solidFill>
-                <a:latin typeface="Libre Caslon Display"/>
+                <a:latin typeface="Georgia"/>
               </a:rPr>
               <a:t>Work out your scores</a:t>
             </a:r>
@@ -29015,7 +28850,7 @@
                 <a:solidFill>
                   <a:srgbClr val="FFFDF7"/>
                 </a:solidFill>
-                <a:latin typeface="Karla"/>
+                <a:latin typeface="Calibri"/>
               </a:rPr>
               <a:t>1</a:t>
             </a:r>
@@ -29054,11 +28889,11 @@
               </a:spcAft>
             </a:pPr>
             <a:r>
-              <a:rPr sz="1600" b="1" i="0">
+              <a:rPr sz="1600" b="0" i="0">
                 <a:solidFill>
                   <a:srgbClr val="265C92"/>
                 </a:solidFill>
-                <a:latin typeface="Libre Caslon Display"/>
+                <a:latin typeface="Georgia"/>
               </a:rPr>
               <a:t>Copy the answer, then find the gap</a:t>
             </a:r>
@@ -29101,7 +28936,7 @@
                 <a:solidFill>
                   <a:srgbClr val="5C6552"/>
                 </a:solidFill>
-                <a:latin typeface="Karla"/>
+                <a:latin typeface="Calibri"/>
               </a:rPr>
               <a:t>Copy each answer into The Answer column. Your gap is the difference: a 3 against a 7 is a gap of 4.</a:t>
             </a:r>
@@ -29278,7 +29113,7 @@
                 <a:solidFill>
                   <a:srgbClr val="FFFDF7"/>
                 </a:solidFill>
-                <a:latin typeface="Karla"/>
+                <a:latin typeface="Calibri"/>
               </a:rPr>
               <a:t>2</a:t>
             </a:r>
@@ -29317,11 +29152,11 @@
               </a:spcAft>
             </a:pPr>
             <a:r>
-              <a:rPr sz="1600" b="1" i="0">
+              <a:rPr sz="1600" b="0" i="0">
                 <a:solidFill>
                   <a:srgbClr val="265C92"/>
                 </a:solidFill>
-                <a:latin typeface="Libre Caslon Display"/>
+                <a:latin typeface="Georgia"/>
               </a:rPr>
               <a:t>Add up both gap columns</a:t>
             </a:r>
@@ -29364,7 +29199,7 @@
                 <a:solidFill>
                   <a:srgbClr val="5C6552"/>
                 </a:solidFill>
-                <a:latin typeface="Karla"/>
+                <a:latin typeface="Calibri"/>
               </a:rPr>
               <a:t>Add up My Gap, then Team Gap. The lower the score, the better.</a:t>
             </a:r>
@@ -29541,7 +29376,7 @@
                 <a:solidFill>
                   <a:srgbClr val="FFFDF7"/>
                 </a:solidFill>
-                <a:latin typeface="Karla"/>
+                <a:latin typeface="Calibri"/>
               </a:rPr>
               <a:t>3</a:t>
             </a:r>
@@ -29580,11 +29415,11 @@
               </a:spcAft>
             </a:pPr>
             <a:r>
-              <a:rPr sz="1600" b="1" i="0">
+              <a:rPr sz="1600" b="0" i="0">
                 <a:solidFill>
                   <a:srgbClr val="265C92"/>
                 </a:solidFill>
-                <a:latin typeface="Libre Caslon Display"/>
+                <a:latin typeface="Georgia"/>
               </a:rPr>
               <a:t>Compare</a:t>
             </a:r>
@@ -29627,7 +29462,7 @@
                 <a:solidFill>
                   <a:srgbClr val="5C6552"/>
                 </a:solidFill>
-                <a:latin typeface="Karla"/>
+                <a:latin typeface="Calibri"/>
               </a:rPr>
               <a:t>Hands up if the team scored lower than you did on your own.</a:t>
             </a:r>
@@ -29695,7 +29530,7 @@
                 <a:solidFill>
                   <a:srgbClr val="8B9179"/>
                 </a:solidFill>
-                <a:latin typeface="Karla"/>
+                <a:latin typeface="Calibri"/>
               </a:rPr>
               <a:t>The Pastoral Guide</a:t>
             </a:r>
@@ -29738,7 +29573,7 @@
                 <a:solidFill>
                   <a:srgbClr val="8B9179"/>
                 </a:solidFill>
-                <a:latin typeface="Karla"/>
+                <a:latin typeface="Calibri"/>
               </a:rPr>
               <a:t>9 / 35</a:t>
             </a:r>
